--- a/02_CMK_Microsoft_Fabric/CMK_Fabric-4.pptx
+++ b/02_CMK_Microsoft_Fabric/CMK_Fabric-4.pptx
@@ -12933,7 +12933,7 @@
               <a:buChar char="•"/>
             </a:pPr>
             <a:r>
-              <a:rPr lang="en-US" sz="1600" b="0" i="0" u="none" strike="noStrike" cap="none">
+              <a:rPr lang="en-US" sz="1600" b="0" i="0" u="none" strike="noStrike" cap="none" dirty="0">
                 <a:solidFill>
                   <a:srgbClr val="C9D6DB"/>
                 </a:solidFill>
@@ -12942,9 +12942,21 @@
                 <a:cs typeface="Calibri"/>
                 <a:sym typeface="Calibri"/>
               </a:rPr>
-              <a:t>Recognized your organization in one of the four scenarios on the previous slide? That's usually your answer.</a:t>
-            </a:r>
-            <a:endParaRPr sz="1600" b="0" i="0" u="none" strike="noStrike" cap="none">
+              <a:t>your organization </a:t>
+            </a:r>
+            <a:r>
+              <a:rPr lang="en-US" sz="1600" dirty="0">
+                <a:solidFill>
+                  <a:srgbClr val="C9D6DB"/>
+                </a:solidFill>
+                <a:latin typeface="Calibri"/>
+                <a:ea typeface="Calibri"/>
+                <a:cs typeface="Calibri"/>
+                <a:sym typeface="Calibri"/>
+              </a:rPr>
+              <a:t>has a clear scenario for using CMKs</a:t>
+            </a:r>
+            <a:endParaRPr sz="1600" b="0" i="0" u="none" strike="noStrike" cap="none" dirty="0">
               <a:solidFill>
                 <a:schemeClr val="dk1"/>
               </a:solidFill>

--- a/02_CMK_Microsoft_Fabric/CMK_Fabric-4.pptx
+++ b/02_CMK_Microsoft_Fabric/CMK_Fabric-4.pptx
@@ -5,27 +5,28 @@
     <p:sldMasterId id="2147483649" r:id="rId1"/>
   </p:sldMasterIdLst>
   <p:notesMasterIdLst>
-    <p:notesMasterId r:id="rId20"/>
+    <p:notesMasterId r:id="rId21"/>
   </p:notesMasterIdLst>
   <p:sldIdLst>
     <p:sldId id="256" r:id="rId2"/>
-    <p:sldId id="269" r:id="rId3"/>
-    <p:sldId id="257" r:id="rId4"/>
-    <p:sldId id="258" r:id="rId5"/>
-    <p:sldId id="259" r:id="rId6"/>
-    <p:sldId id="260" r:id="rId7"/>
-    <p:sldId id="261" r:id="rId8"/>
-    <p:sldId id="262" r:id="rId9"/>
-    <p:sldId id="263" r:id="rId10"/>
-    <p:sldId id="264" r:id="rId11"/>
-    <p:sldId id="272" r:id="rId12"/>
-    <p:sldId id="273" r:id="rId13"/>
-    <p:sldId id="265" r:id="rId14"/>
-    <p:sldId id="266" r:id="rId15"/>
-    <p:sldId id="270" r:id="rId16"/>
-    <p:sldId id="267" r:id="rId17"/>
-    <p:sldId id="268" r:id="rId18"/>
-    <p:sldId id="271" r:id="rId19"/>
+    <p:sldId id="274" r:id="rId3"/>
+    <p:sldId id="269" r:id="rId4"/>
+    <p:sldId id="257" r:id="rId5"/>
+    <p:sldId id="258" r:id="rId6"/>
+    <p:sldId id="259" r:id="rId7"/>
+    <p:sldId id="260" r:id="rId8"/>
+    <p:sldId id="261" r:id="rId9"/>
+    <p:sldId id="262" r:id="rId10"/>
+    <p:sldId id="263" r:id="rId11"/>
+    <p:sldId id="264" r:id="rId12"/>
+    <p:sldId id="272" r:id="rId13"/>
+    <p:sldId id="273" r:id="rId14"/>
+    <p:sldId id="265" r:id="rId15"/>
+    <p:sldId id="266" r:id="rId16"/>
+    <p:sldId id="270" r:id="rId17"/>
+    <p:sldId id="267" r:id="rId18"/>
+    <p:sldId id="268" r:id="rId19"/>
+    <p:sldId id="271" r:id="rId20"/>
   </p:sldIdLst>
   <p:sldSz cx="12192000" cy="6858000"/>
   <p:notesSz cx="6858000" cy="12192000"/>
@@ -1773,7 +1774,7 @@
             </a:pPr>
             <a:fld id="{00000000-1234-1234-1234-123412341234}" type="slidenum">
               <a:rPr lang="en-US"/>
-              <a:t>10</a:t>
+              <a:t>11</a:t>
             </a:fld>
             <a:endParaRPr/>
           </a:p>
@@ -1937,7 +1938,7 @@
             </a:pPr>
             <a:fld id="{00000000-1234-1234-1234-123412341234}" type="slidenum">
               <a:rPr lang="en-US"/>
-              <a:t>11</a:t>
+              <a:t>12</a:t>
             </a:fld>
             <a:endParaRPr/>
           </a:p>
@@ -2106,7 +2107,7 @@
             </a:pPr>
             <a:fld id="{00000000-1234-1234-1234-123412341234}" type="slidenum">
               <a:rPr lang="en-US"/>
-              <a:t>12</a:t>
+              <a:t>13</a:t>
             </a:fld>
             <a:endParaRPr/>
           </a:p>
@@ -2275,7 +2276,7 @@
             </a:pPr>
             <a:fld id="{00000000-1234-1234-1234-123412341234}" type="slidenum">
               <a:rPr lang="en-US"/>
-              <a:t>13</a:t>
+              <a:t>14</a:t>
             </a:fld>
             <a:endParaRPr/>
           </a:p>
@@ -2439,7 +2440,7 @@
             </a:pPr>
             <a:fld id="{00000000-1234-1234-1234-123412341234}" type="slidenum">
               <a:rPr lang="en-US"/>
-              <a:t>14</a:t>
+              <a:t>15</a:t>
             </a:fld>
             <a:endParaRPr/>
           </a:p>
@@ -2603,7 +2604,7 @@
             </a:pPr>
             <a:fld id="{00000000-1234-1234-1234-123412341234}" type="slidenum">
               <a:rPr lang="en-US"/>
-              <a:t>15</a:t>
+              <a:t>16</a:t>
             </a:fld>
             <a:endParaRPr/>
           </a:p>
@@ -2767,7 +2768,7 @@
             </a:pPr>
             <a:fld id="{00000000-1234-1234-1234-123412341234}" type="slidenum">
               <a:rPr lang="en-US"/>
-              <a:t>16</a:t>
+              <a:t>17</a:t>
             </a:fld>
             <a:endParaRPr/>
           </a:p>
@@ -2931,7 +2932,7 @@
             </a:pPr>
             <a:fld id="{00000000-1234-1234-1234-123412341234}" type="slidenum">
               <a:rPr lang="en-US"/>
-              <a:t>17</a:t>
+              <a:t>18</a:t>
             </a:fld>
             <a:endParaRPr/>
           </a:p>
@@ -3095,7 +3096,7 @@
             </a:pPr>
             <a:fld id="{00000000-1234-1234-1234-123412341234}" type="slidenum">
               <a:rPr lang="en-US"/>
-              <a:t>18</a:t>
+              <a:t>19</a:t>
             </a:fld>
             <a:endParaRPr/>
           </a:p>
@@ -3264,7 +3265,7 @@
             </a:pPr>
             <a:fld id="{00000000-1234-1234-1234-123412341234}" type="slidenum">
               <a:rPr lang="en-US"/>
-              <a:t>2</a:t>
+              <a:t>3</a:t>
             </a:fld>
             <a:endParaRPr/>
           </a:p>
@@ -3428,7 +3429,7 @@
             </a:pPr>
             <a:fld id="{00000000-1234-1234-1234-123412341234}" type="slidenum">
               <a:rPr lang="en-US"/>
-              <a:t>3</a:t>
+              <a:t>4</a:t>
             </a:fld>
             <a:endParaRPr/>
           </a:p>
@@ -3626,7 +3627,7 @@
             </a:pPr>
             <a:fld id="{00000000-1234-1234-1234-123412341234}" type="slidenum">
               <a:rPr lang="en-US"/>
-              <a:t>4</a:t>
+              <a:t>5</a:t>
             </a:fld>
             <a:endParaRPr/>
           </a:p>
@@ -3790,7 +3791,7 @@
             </a:pPr>
             <a:fld id="{00000000-1234-1234-1234-123412341234}" type="slidenum">
               <a:rPr lang="en-US"/>
-              <a:t>5</a:t>
+              <a:t>6</a:t>
             </a:fld>
             <a:endParaRPr/>
           </a:p>
@@ -3954,7 +3955,7 @@
             </a:pPr>
             <a:fld id="{00000000-1234-1234-1234-123412341234}" type="slidenum">
               <a:rPr lang="en-US"/>
-              <a:t>6</a:t>
+              <a:t>7</a:t>
             </a:fld>
             <a:endParaRPr/>
           </a:p>
@@ -4118,7 +4119,7 @@
             </a:pPr>
             <a:fld id="{00000000-1234-1234-1234-123412341234}" type="slidenum">
               <a:rPr lang="en-US"/>
-              <a:t>7</a:t>
+              <a:t>8</a:t>
             </a:fld>
             <a:endParaRPr/>
           </a:p>
@@ -4282,7 +4283,7 @@
             </a:pPr>
             <a:fld id="{00000000-1234-1234-1234-123412341234}" type="slidenum">
               <a:rPr lang="en-US"/>
-              <a:t>8</a:t>
+              <a:t>9</a:t>
             </a:fld>
             <a:endParaRPr/>
           </a:p>
@@ -4446,7 +4447,7 @@
             </a:pPr>
             <a:fld id="{00000000-1234-1234-1234-123412341234}" type="slidenum">
               <a:rPr lang="en-US"/>
-              <a:t>9</a:t>
+              <a:t>10</a:t>
             </a:fld>
             <a:endParaRPr/>
           </a:p>
@@ -5804,6 +5805,1147 @@
     </p:bg>
     <p:spTree>
       <p:nvGrpSpPr>
+        <p:cNvPr id="1" name="Shape 212"/>
+        <p:cNvGrpSpPr/>
+        <p:nvPr/>
+      </p:nvGrpSpPr>
+      <p:grpSpPr>
+        <a:xfrm>
+          <a:off x="0" y="0"/>
+          <a:ext cx="0" cy="0"/>
+          <a:chOff x="0" y="0"/>
+          <a:chExt cx="0" cy="0"/>
+        </a:xfrm>
+      </p:grpSpPr>
+      <p:sp>
+        <p:nvSpPr>
+          <p:cNvPr id="213" name="Google Shape;213;p10"/>
+          <p:cNvSpPr/>
+          <p:nvPr/>
+        </p:nvSpPr>
+        <p:spPr>
+          <a:xfrm>
+            <a:off x="640080" y="548640"/>
+            <a:ext cx="5486400" cy="274320"/>
+          </a:xfrm>
+          <a:prstGeom prst="rect">
+            <a:avLst/>
+          </a:prstGeom>
+          <a:noFill/>
+          <a:ln>
+            <a:noFill/>
+          </a:ln>
+        </p:spPr>
+        <p:txBody>
+          <a:bodyPr spcFirstLastPara="1" wrap="square" lIns="0" tIns="0" rIns="0" bIns="0" anchor="ctr" anchorCtr="0">
+            <a:noAutofit/>
+          </a:bodyPr>
+          <a:lstStyle/>
+          <a:p>
+            <a:pPr marL="0" marR="0" lvl="0" indent="0" algn="l" rtl="0">
+              <a:spcBef>
+                <a:spcPts val="0"/>
+              </a:spcBef>
+              <a:spcAft>
+                <a:spcPts val="0"/>
+              </a:spcAft>
+              <a:buClr>
+                <a:srgbClr val="7FE3D3"/>
+              </a:buClr>
+              <a:buSzPts val="1200"/>
+              <a:buFont typeface="Calibri"/>
+              <a:buNone/>
+            </a:pPr>
+            <a:r>
+              <a:rPr lang="en-US" sz="1200" b="1" i="0" u="none" strike="noStrike" cap="none">
+                <a:solidFill>
+                  <a:srgbClr val="7FE3D3"/>
+                </a:solidFill>
+                <a:latin typeface="Calibri"/>
+                <a:ea typeface="Calibri"/>
+                <a:cs typeface="Calibri"/>
+                <a:sym typeface="Calibri"/>
+              </a:rPr>
+              <a:t>THE TRUST MODEL</a:t>
+            </a:r>
+            <a:endParaRPr sz="1200" b="0" i="0" u="none" strike="noStrike" cap="none">
+              <a:solidFill>
+                <a:schemeClr val="dk1"/>
+              </a:solidFill>
+              <a:latin typeface="Calibri"/>
+              <a:ea typeface="Calibri"/>
+              <a:cs typeface="Calibri"/>
+              <a:sym typeface="Calibri"/>
+            </a:endParaRPr>
+          </a:p>
+        </p:txBody>
+      </p:sp>
+      <p:sp>
+        <p:nvSpPr>
+          <p:cNvPr id="214" name="Google Shape;214;p10"/>
+          <p:cNvSpPr/>
+          <p:nvPr/>
+        </p:nvSpPr>
+        <p:spPr>
+          <a:xfrm>
+            <a:off x="640080" y="566928"/>
+            <a:ext cx="10972800" cy="822960"/>
+          </a:xfrm>
+          <a:prstGeom prst="rect">
+            <a:avLst/>
+          </a:prstGeom>
+          <a:noFill/>
+          <a:ln>
+            <a:noFill/>
+          </a:ln>
+        </p:spPr>
+        <p:txBody>
+          <a:bodyPr spcFirstLastPara="1" wrap="square" lIns="0" tIns="0" rIns="0" bIns="0" anchor="ctr" anchorCtr="0">
+            <a:noAutofit/>
+          </a:bodyPr>
+          <a:lstStyle/>
+          <a:p>
+            <a:pPr marL="0" marR="0" lvl="0" indent="0" algn="l" rtl="0">
+              <a:spcBef>
+                <a:spcPts val="0"/>
+              </a:spcBef>
+              <a:spcAft>
+                <a:spcPts val="0"/>
+              </a:spcAft>
+              <a:buClr>
+                <a:srgbClr val="FFFFFF"/>
+              </a:buClr>
+              <a:buSzPts val="3200"/>
+              <a:buFont typeface="Cambria"/>
+              <a:buNone/>
+            </a:pPr>
+            <a:r>
+              <a:rPr lang="en-US" sz="3200" b="1" i="0" u="none" strike="noStrike" cap="none">
+                <a:solidFill>
+                  <a:srgbClr val="FFFFFF"/>
+                </a:solidFill>
+                <a:latin typeface="Cambria"/>
+                <a:ea typeface="Cambria"/>
+                <a:cs typeface="Cambria"/>
+                <a:sym typeface="Cambria"/>
+              </a:rPr>
+              <a:t>But does the key live inside Microsoft?</a:t>
+            </a:r>
+            <a:endParaRPr sz="3200" b="0" i="0" u="none" strike="noStrike" cap="none">
+              <a:solidFill>
+                <a:schemeClr val="dk1"/>
+              </a:solidFill>
+              <a:latin typeface="Calibri"/>
+              <a:ea typeface="Calibri"/>
+              <a:cs typeface="Calibri"/>
+              <a:sym typeface="Calibri"/>
+            </a:endParaRPr>
+          </a:p>
+        </p:txBody>
+      </p:sp>
+      <p:sp>
+        <p:nvSpPr>
+          <p:cNvPr id="215" name="Google Shape;215;p10"/>
+          <p:cNvSpPr/>
+          <p:nvPr/>
+        </p:nvSpPr>
+        <p:spPr>
+          <a:xfrm>
+            <a:off x="640080" y="1499616"/>
+            <a:ext cx="5349240" cy="3657600"/>
+          </a:xfrm>
+          <a:prstGeom prst="roundRect">
+            <a:avLst>
+              <a:gd name="adj" fmla="val 2000"/>
+            </a:avLst>
+          </a:prstGeom>
+          <a:solidFill>
+            <a:srgbClr val="16323A"/>
+          </a:solidFill>
+          <a:ln w="12700" cap="flat" cmpd="sng">
+            <a:solidFill>
+              <a:srgbClr val="3AAFA9"/>
+            </a:solidFill>
+            <a:prstDash val="solid"/>
+            <a:round/>
+            <a:headEnd type="none" w="sm" len="sm"/>
+            <a:tailEnd type="none" w="sm" len="sm"/>
+          </a:ln>
+        </p:spPr>
+        <p:txBody>
+          <a:bodyPr spcFirstLastPara="1" wrap="square" lIns="91425" tIns="91425" rIns="91425" bIns="91425" anchor="ctr" anchorCtr="0">
+            <a:noAutofit/>
+          </a:bodyPr>
+          <a:lstStyle/>
+          <a:p>
+            <a:pPr marL="0" lvl="0" indent="0" algn="l" rtl="0">
+              <a:spcBef>
+                <a:spcPts val="0"/>
+              </a:spcBef>
+              <a:spcAft>
+                <a:spcPts val="0"/>
+              </a:spcAft>
+              <a:buNone/>
+            </a:pPr>
+            <a:endParaRPr/>
+          </a:p>
+        </p:txBody>
+      </p:sp>
+      <p:sp>
+        <p:nvSpPr>
+          <p:cNvPr id="216" name="Google Shape;216;p10"/>
+          <p:cNvSpPr/>
+          <p:nvPr/>
+        </p:nvSpPr>
+        <p:spPr>
+          <a:xfrm>
+            <a:off x="960120" y="1819656"/>
+            <a:ext cx="713232" cy="713232"/>
+          </a:xfrm>
+          <a:prstGeom prst="ellipse">
+            <a:avLst/>
+          </a:prstGeom>
+          <a:solidFill>
+            <a:srgbClr val="0E7C7B"/>
+          </a:solidFill>
+          <a:ln>
+            <a:noFill/>
+          </a:ln>
+          <a:effectLst>
+            <a:outerShdw blurRad="63500" dist="25400" dir="5400000" algn="bl" rotWithShape="0">
+              <a:srgbClr val="000000">
+                <a:alpha val="18039"/>
+              </a:srgbClr>
+            </a:outerShdw>
+          </a:effectLst>
+        </p:spPr>
+        <p:txBody>
+          <a:bodyPr spcFirstLastPara="1" wrap="square" lIns="91425" tIns="91425" rIns="91425" bIns="91425" anchor="ctr" anchorCtr="0">
+            <a:noAutofit/>
+          </a:bodyPr>
+          <a:lstStyle/>
+          <a:p>
+            <a:pPr marL="0" lvl="0" indent="0" algn="l" rtl="0">
+              <a:spcBef>
+                <a:spcPts val="0"/>
+              </a:spcBef>
+              <a:spcAft>
+                <a:spcPts val="0"/>
+              </a:spcAft>
+              <a:buNone/>
+            </a:pPr>
+            <a:endParaRPr/>
+          </a:p>
+        </p:txBody>
+      </p:sp>
+      <p:pic>
+        <p:nvPicPr>
+          <p:cNvPr id="217" name="Google Shape;217;p10" descr="preencoded.png"/>
+          <p:cNvPicPr preferRelativeResize="0"/>
+          <p:nvPr/>
+        </p:nvPicPr>
+        <p:blipFill rotWithShape="1">
+          <a:blip r:embed="rId3">
+            <a:alphaModFix/>
+          </a:blip>
+          <a:srcRect/>
+          <a:stretch/>
+        </p:blipFill>
+        <p:spPr>
+          <a:xfrm>
+            <a:off x="1152693" y="2012229"/>
+            <a:ext cx="328087" cy="328087"/>
+          </a:xfrm>
+          <a:prstGeom prst="rect">
+            <a:avLst/>
+          </a:prstGeom>
+          <a:noFill/>
+          <a:ln>
+            <a:noFill/>
+          </a:ln>
+        </p:spPr>
+      </p:pic>
+      <p:sp>
+        <p:nvSpPr>
+          <p:cNvPr id="218" name="Google Shape;218;p10"/>
+          <p:cNvSpPr/>
+          <p:nvPr/>
+        </p:nvSpPr>
+        <p:spPr>
+          <a:xfrm>
+            <a:off x="1874520" y="1911096"/>
+            <a:ext cx="3840480" cy="548640"/>
+          </a:xfrm>
+          <a:prstGeom prst="rect">
+            <a:avLst/>
+          </a:prstGeom>
+          <a:noFill/>
+          <a:ln>
+            <a:noFill/>
+          </a:ln>
+        </p:spPr>
+        <p:txBody>
+          <a:bodyPr spcFirstLastPara="1" wrap="square" lIns="0" tIns="0" rIns="0" bIns="0" anchor="ctr" anchorCtr="0">
+            <a:noAutofit/>
+          </a:bodyPr>
+          <a:lstStyle/>
+          <a:p>
+            <a:pPr marL="0" marR="0" lvl="0" indent="0" algn="l" rtl="0">
+              <a:spcBef>
+                <a:spcPts val="0"/>
+              </a:spcBef>
+              <a:spcAft>
+                <a:spcPts val="0"/>
+              </a:spcAft>
+              <a:buClr>
+                <a:srgbClr val="FFFFFF"/>
+              </a:buClr>
+              <a:buSzPts val="1550"/>
+              <a:buFont typeface="Calibri"/>
+              <a:buNone/>
+            </a:pPr>
+            <a:r>
+              <a:rPr lang="en-US" sz="1800" b="1" i="0" u="none" strike="noStrike" cap="none" dirty="0">
+                <a:solidFill>
+                  <a:srgbClr val="FFFFFF"/>
+                </a:solidFill>
+                <a:latin typeface="Calibri"/>
+                <a:ea typeface="Calibri"/>
+                <a:cs typeface="Calibri"/>
+                <a:sym typeface="Calibri"/>
+              </a:rPr>
+              <a:t>Yes, the hardware is Microsoft's</a:t>
+            </a:r>
+            <a:endParaRPr sz="1800" b="0" i="0" u="none" strike="noStrike" cap="none" dirty="0">
+              <a:solidFill>
+                <a:schemeClr val="dk1"/>
+              </a:solidFill>
+              <a:latin typeface="Calibri"/>
+              <a:ea typeface="Calibri"/>
+              <a:cs typeface="Calibri"/>
+              <a:sym typeface="Calibri"/>
+            </a:endParaRPr>
+          </a:p>
+        </p:txBody>
+      </p:sp>
+      <p:sp>
+        <p:nvSpPr>
+          <p:cNvPr id="219" name="Google Shape;219;p10"/>
+          <p:cNvSpPr/>
+          <p:nvPr/>
+        </p:nvSpPr>
+        <p:spPr>
+          <a:xfrm>
+            <a:off x="1051560" y="2779776"/>
+            <a:ext cx="4754880" cy="2103120"/>
+          </a:xfrm>
+          <a:prstGeom prst="rect">
+            <a:avLst/>
+          </a:prstGeom>
+          <a:noFill/>
+          <a:ln>
+            <a:noFill/>
+          </a:ln>
+        </p:spPr>
+        <p:txBody>
+          <a:bodyPr spcFirstLastPara="1" wrap="square" lIns="0" tIns="0" rIns="0" bIns="0" anchor="ctr" anchorCtr="0">
+            <a:noAutofit/>
+          </a:bodyPr>
+          <a:lstStyle/>
+          <a:p>
+            <a:pPr marL="342900" marR="0" lvl="0" indent="-342900" algn="l" rtl="0">
+              <a:lnSpc>
+                <a:spcPct val="169230"/>
+              </a:lnSpc>
+              <a:spcBef>
+                <a:spcPts val="0"/>
+              </a:spcBef>
+              <a:spcAft>
+                <a:spcPts val="0"/>
+              </a:spcAft>
+              <a:buClr>
+                <a:srgbClr val="C9D6DB"/>
+              </a:buClr>
+              <a:buSzPts val="1300"/>
+              <a:buFont typeface="Calibri"/>
+              <a:buChar char="•"/>
+            </a:pPr>
+            <a:r>
+              <a:rPr lang="en-US" b="0" i="0" u="none" strike="noStrike" cap="none" dirty="0">
+                <a:solidFill>
+                  <a:srgbClr val="C9D6DB"/>
+                </a:solidFill>
+                <a:latin typeface="Calibri"/>
+                <a:ea typeface="Calibri"/>
+                <a:cs typeface="Calibri"/>
+                <a:sym typeface="Calibri"/>
+              </a:rPr>
+              <a:t>Runs in Microsoft datacenters</a:t>
+            </a:r>
+            <a:endParaRPr b="0" i="0" u="none" strike="noStrike" cap="none" dirty="0">
+              <a:solidFill>
+                <a:schemeClr val="dk1"/>
+              </a:solidFill>
+              <a:latin typeface="Calibri"/>
+              <a:ea typeface="Calibri"/>
+              <a:cs typeface="Calibri"/>
+              <a:sym typeface="Calibri"/>
+            </a:endParaRPr>
+          </a:p>
+          <a:p>
+            <a:pPr marL="342900" marR="0" lvl="0" indent="-342900" algn="l" rtl="0">
+              <a:lnSpc>
+                <a:spcPct val="169230"/>
+              </a:lnSpc>
+              <a:spcBef>
+                <a:spcPts val="0"/>
+              </a:spcBef>
+              <a:spcAft>
+                <a:spcPts val="0"/>
+              </a:spcAft>
+              <a:buClr>
+                <a:srgbClr val="C9D6DB"/>
+              </a:buClr>
+              <a:buSzPts val="1300"/>
+              <a:buFont typeface="Calibri"/>
+              <a:buChar char="•"/>
+            </a:pPr>
+            <a:r>
+              <a:rPr lang="en-US" b="0" i="0" u="none" strike="noStrike" cap="none" dirty="0">
+                <a:solidFill>
+                  <a:srgbClr val="C9D6DB"/>
+                </a:solidFill>
+                <a:latin typeface="Calibri"/>
+                <a:ea typeface="Calibri"/>
+                <a:cs typeface="Calibri"/>
+                <a:sym typeface="Calibri"/>
+              </a:rPr>
+              <a:t>Microsoft patches &amp; maintains the machines</a:t>
+            </a:r>
+            <a:endParaRPr b="0" i="0" u="none" strike="noStrike" cap="none" dirty="0">
+              <a:solidFill>
+                <a:schemeClr val="dk1"/>
+              </a:solidFill>
+              <a:latin typeface="Calibri"/>
+              <a:ea typeface="Calibri"/>
+              <a:cs typeface="Calibri"/>
+              <a:sym typeface="Calibri"/>
+            </a:endParaRPr>
+          </a:p>
+          <a:p>
+            <a:pPr marL="342900" marR="0" lvl="0" indent="-342900" algn="l" rtl="0">
+              <a:lnSpc>
+                <a:spcPct val="169230"/>
+              </a:lnSpc>
+              <a:spcBef>
+                <a:spcPts val="0"/>
+              </a:spcBef>
+              <a:spcAft>
+                <a:spcPts val="0"/>
+              </a:spcAft>
+              <a:buClr>
+                <a:srgbClr val="C9D6DB"/>
+              </a:buClr>
+              <a:buSzPts val="1300"/>
+              <a:buFont typeface="Calibri"/>
+              <a:buChar char="•"/>
+            </a:pPr>
+            <a:r>
+              <a:rPr lang="en-US" b="0" i="0" u="none" strike="noStrike" cap="none" dirty="0">
+                <a:solidFill>
+                  <a:srgbClr val="C9D6DB"/>
+                </a:solidFill>
+                <a:latin typeface="Calibri"/>
+                <a:ea typeface="Calibri"/>
+                <a:cs typeface="Calibri"/>
+                <a:sym typeface="Calibri"/>
+              </a:rPr>
+              <a:t>“Managed” means they manage the hardware</a:t>
+            </a:r>
+            <a:endParaRPr b="0" i="0" u="none" strike="noStrike" cap="none" dirty="0">
+              <a:solidFill>
+                <a:schemeClr val="dk1"/>
+              </a:solidFill>
+              <a:latin typeface="Calibri"/>
+              <a:ea typeface="Calibri"/>
+              <a:cs typeface="Calibri"/>
+              <a:sym typeface="Calibri"/>
+            </a:endParaRPr>
+          </a:p>
+          <a:p>
+            <a:pPr marL="342900" marR="0" lvl="0" indent="-342900" algn="l" rtl="0">
+              <a:lnSpc>
+                <a:spcPct val="169230"/>
+              </a:lnSpc>
+              <a:spcBef>
+                <a:spcPts val="0"/>
+              </a:spcBef>
+              <a:spcAft>
+                <a:spcPts val="0"/>
+              </a:spcAft>
+              <a:buClr>
+                <a:srgbClr val="C9D6DB"/>
+              </a:buClr>
+              <a:buSzPts val="1300"/>
+              <a:buFont typeface="Calibri"/>
+              <a:buChar char="•"/>
+            </a:pPr>
+            <a:r>
+              <a:rPr lang="en-US" b="0" i="0" u="none" strike="noStrike" cap="none" dirty="0">
+                <a:solidFill>
+                  <a:srgbClr val="C9D6DB"/>
+                </a:solidFill>
+                <a:latin typeface="Calibri"/>
+                <a:ea typeface="Calibri"/>
+                <a:cs typeface="Calibri"/>
+                <a:sym typeface="Calibri"/>
+              </a:rPr>
+              <a:t>You don't host a physical device</a:t>
+            </a:r>
+            <a:endParaRPr b="0" i="0" u="none" strike="noStrike" cap="none" dirty="0">
+              <a:solidFill>
+                <a:schemeClr val="dk1"/>
+              </a:solidFill>
+              <a:latin typeface="Calibri"/>
+              <a:ea typeface="Calibri"/>
+              <a:cs typeface="Calibri"/>
+              <a:sym typeface="Calibri"/>
+            </a:endParaRPr>
+          </a:p>
+        </p:txBody>
+      </p:sp>
+      <p:sp>
+        <p:nvSpPr>
+          <p:cNvPr id="220" name="Google Shape;220;p10"/>
+          <p:cNvSpPr/>
+          <p:nvPr/>
+        </p:nvSpPr>
+        <p:spPr>
+          <a:xfrm>
+            <a:off x="6172200" y="1499616"/>
+            <a:ext cx="5349240" cy="3657600"/>
+          </a:xfrm>
+          <a:prstGeom prst="roundRect">
+            <a:avLst>
+              <a:gd name="adj" fmla="val 2000"/>
+            </a:avLst>
+          </a:prstGeom>
+          <a:solidFill>
+            <a:srgbClr val="0E7C7B"/>
+          </a:solidFill>
+          <a:ln>
+            <a:noFill/>
+          </a:ln>
+        </p:spPr>
+        <p:txBody>
+          <a:bodyPr spcFirstLastPara="1" wrap="square" lIns="91425" tIns="91425" rIns="91425" bIns="91425" anchor="ctr" anchorCtr="0">
+            <a:noAutofit/>
+          </a:bodyPr>
+          <a:lstStyle/>
+          <a:p>
+            <a:pPr marL="0" lvl="0" indent="0" algn="l" rtl="0">
+              <a:spcBef>
+                <a:spcPts val="0"/>
+              </a:spcBef>
+              <a:spcAft>
+                <a:spcPts val="0"/>
+              </a:spcAft>
+              <a:buNone/>
+            </a:pPr>
+            <a:endParaRPr/>
+          </a:p>
+        </p:txBody>
+      </p:sp>
+      <p:sp>
+        <p:nvSpPr>
+          <p:cNvPr id="221" name="Google Shape;221;p10"/>
+          <p:cNvSpPr/>
+          <p:nvPr/>
+        </p:nvSpPr>
+        <p:spPr>
+          <a:xfrm>
+            <a:off x="6492240" y="1819656"/>
+            <a:ext cx="713232" cy="713232"/>
+          </a:xfrm>
+          <a:prstGeom prst="ellipse">
+            <a:avLst/>
+          </a:prstGeom>
+          <a:solidFill>
+            <a:srgbClr val="1B2A33"/>
+          </a:solidFill>
+          <a:ln>
+            <a:noFill/>
+          </a:ln>
+          <a:effectLst>
+            <a:outerShdw blurRad="63500" dist="25400" dir="5400000" algn="bl" rotWithShape="0">
+              <a:srgbClr val="000000">
+                <a:alpha val="18039"/>
+              </a:srgbClr>
+            </a:outerShdw>
+          </a:effectLst>
+        </p:spPr>
+        <p:txBody>
+          <a:bodyPr spcFirstLastPara="1" wrap="square" lIns="91425" tIns="91425" rIns="91425" bIns="91425" anchor="ctr" anchorCtr="0">
+            <a:noAutofit/>
+          </a:bodyPr>
+          <a:lstStyle/>
+          <a:p>
+            <a:pPr marL="0" lvl="0" indent="0" algn="l" rtl="0">
+              <a:spcBef>
+                <a:spcPts val="0"/>
+              </a:spcBef>
+              <a:spcAft>
+                <a:spcPts val="0"/>
+              </a:spcAft>
+              <a:buNone/>
+            </a:pPr>
+            <a:endParaRPr/>
+          </a:p>
+        </p:txBody>
+      </p:sp>
+      <p:pic>
+        <p:nvPicPr>
+          <p:cNvPr id="222" name="Google Shape;222;p10" descr="preencoded.png"/>
+          <p:cNvPicPr preferRelativeResize="0"/>
+          <p:nvPr/>
+        </p:nvPicPr>
+        <p:blipFill rotWithShape="1">
+          <a:blip r:embed="rId4">
+            <a:alphaModFix/>
+          </a:blip>
+          <a:srcRect/>
+          <a:stretch/>
+        </p:blipFill>
+        <p:spPr>
+          <a:xfrm>
+            <a:off x="6684813" y="2012229"/>
+            <a:ext cx="328087" cy="328087"/>
+          </a:xfrm>
+          <a:prstGeom prst="rect">
+            <a:avLst/>
+          </a:prstGeom>
+          <a:noFill/>
+          <a:ln>
+            <a:noFill/>
+          </a:ln>
+        </p:spPr>
+      </p:pic>
+      <p:sp>
+        <p:nvSpPr>
+          <p:cNvPr id="223" name="Google Shape;223;p10"/>
+          <p:cNvSpPr/>
+          <p:nvPr/>
+        </p:nvSpPr>
+        <p:spPr>
+          <a:xfrm>
+            <a:off x="7406640" y="1911096"/>
+            <a:ext cx="3840480" cy="548640"/>
+          </a:xfrm>
+          <a:prstGeom prst="rect">
+            <a:avLst/>
+          </a:prstGeom>
+          <a:noFill/>
+          <a:ln>
+            <a:noFill/>
+          </a:ln>
+        </p:spPr>
+        <p:txBody>
+          <a:bodyPr spcFirstLastPara="1" wrap="square" lIns="0" tIns="0" rIns="0" bIns="0" anchor="ctr" anchorCtr="0">
+            <a:noAutofit/>
+          </a:bodyPr>
+          <a:lstStyle/>
+          <a:p>
+            <a:pPr marL="0" marR="0" lvl="0" indent="0" algn="l" rtl="0">
+              <a:spcBef>
+                <a:spcPts val="0"/>
+              </a:spcBef>
+              <a:spcAft>
+                <a:spcPts val="0"/>
+              </a:spcAft>
+              <a:buClr>
+                <a:srgbClr val="FFFFFF"/>
+              </a:buClr>
+              <a:buSzPts val="1550"/>
+              <a:buFont typeface="Calibri"/>
+              <a:buNone/>
+            </a:pPr>
+            <a:r>
+              <a:rPr lang="en-US" sz="1800" b="1" i="0" u="none" strike="noStrike" cap="none" dirty="0">
+                <a:solidFill>
+                  <a:srgbClr val="FFFFFF"/>
+                </a:solidFill>
+                <a:latin typeface="Calibri"/>
+                <a:ea typeface="Calibri"/>
+                <a:cs typeface="Calibri"/>
+                <a:sym typeface="Calibri"/>
+              </a:rPr>
+              <a:t>But the key is out of their reach</a:t>
+            </a:r>
+            <a:endParaRPr sz="1800" b="0" i="0" u="none" strike="noStrike" cap="none" dirty="0">
+              <a:solidFill>
+                <a:schemeClr val="dk1"/>
+              </a:solidFill>
+              <a:latin typeface="Calibri"/>
+              <a:ea typeface="Calibri"/>
+              <a:cs typeface="Calibri"/>
+              <a:sym typeface="Calibri"/>
+            </a:endParaRPr>
+          </a:p>
+        </p:txBody>
+      </p:sp>
+      <p:sp>
+        <p:nvSpPr>
+          <p:cNvPr id="224" name="Google Shape;224;p10"/>
+          <p:cNvSpPr/>
+          <p:nvPr/>
+        </p:nvSpPr>
+        <p:spPr>
+          <a:xfrm>
+            <a:off x="6583680" y="2779776"/>
+            <a:ext cx="4754880" cy="2103120"/>
+          </a:xfrm>
+          <a:prstGeom prst="rect">
+            <a:avLst/>
+          </a:prstGeom>
+          <a:noFill/>
+          <a:ln>
+            <a:noFill/>
+          </a:ln>
+        </p:spPr>
+        <p:txBody>
+          <a:bodyPr spcFirstLastPara="1" wrap="square" lIns="0" tIns="0" rIns="0" bIns="0" anchor="ctr" anchorCtr="0">
+            <a:noAutofit/>
+          </a:bodyPr>
+          <a:lstStyle/>
+          <a:p>
+            <a:pPr marL="342900" marR="0" lvl="0" indent="-342900" algn="l" rtl="0">
+              <a:lnSpc>
+                <a:spcPct val="144000"/>
+              </a:lnSpc>
+              <a:spcBef>
+                <a:spcPts val="0"/>
+              </a:spcBef>
+              <a:spcAft>
+                <a:spcPts val="0"/>
+              </a:spcAft>
+              <a:buClr>
+                <a:srgbClr val="EAF7F5"/>
+              </a:buClr>
+              <a:buSzPts val="1250"/>
+              <a:buFont typeface="Calibri"/>
+              <a:buChar char="•"/>
+            </a:pPr>
+            <a:r>
+              <a:rPr lang="en-US" b="0" i="0" u="none" strike="noStrike" cap="none" dirty="0">
+                <a:solidFill>
+                  <a:srgbClr val="EAF7F5"/>
+                </a:solidFill>
+                <a:latin typeface="Calibri"/>
+                <a:ea typeface="Calibri"/>
+                <a:cs typeface="Calibri"/>
+                <a:sym typeface="Calibri"/>
+              </a:rPr>
+              <a:t>On an HSM-backed tier, keys are generated &amp; kept inside FIPS-validated hardware — they never leave in plaintext</a:t>
+            </a:r>
+            <a:endParaRPr b="0" i="0" u="none" strike="noStrike" cap="none" dirty="0">
+              <a:solidFill>
+                <a:schemeClr val="dk1"/>
+              </a:solidFill>
+              <a:latin typeface="Calibri"/>
+              <a:ea typeface="Calibri"/>
+              <a:cs typeface="Calibri"/>
+              <a:sym typeface="Calibri"/>
+            </a:endParaRPr>
+          </a:p>
+          <a:p>
+            <a:pPr marL="342900" marR="0" lvl="0" indent="-342900" algn="l" rtl="0">
+              <a:lnSpc>
+                <a:spcPct val="144000"/>
+              </a:lnSpc>
+              <a:spcBef>
+                <a:spcPts val="0"/>
+              </a:spcBef>
+              <a:spcAft>
+                <a:spcPts val="0"/>
+              </a:spcAft>
+              <a:buClr>
+                <a:srgbClr val="EAF7F5"/>
+              </a:buClr>
+              <a:buSzPts val="1250"/>
+              <a:buFont typeface="Calibri"/>
+              <a:buChar char="•"/>
+            </a:pPr>
+            <a:r>
+              <a:rPr lang="en-US" b="0" i="0" u="none" strike="noStrike" cap="none" dirty="0">
+                <a:solidFill>
+                  <a:srgbClr val="EAF7F5"/>
+                </a:solidFill>
+                <a:latin typeface="Calibri"/>
+                <a:ea typeface="Calibri"/>
+                <a:cs typeface="Calibri"/>
+                <a:sym typeface="Calibri"/>
+              </a:rPr>
+              <a:t>Microsoft operators have no data-plane access to your key material</a:t>
+            </a:r>
+            <a:endParaRPr b="0" i="0" u="none" strike="noStrike" cap="none" dirty="0">
+              <a:solidFill>
+                <a:schemeClr val="dk1"/>
+              </a:solidFill>
+              <a:latin typeface="Calibri"/>
+              <a:ea typeface="Calibri"/>
+              <a:cs typeface="Calibri"/>
+              <a:sym typeface="Calibri"/>
+            </a:endParaRPr>
+          </a:p>
+          <a:p>
+            <a:pPr marL="342900" marR="0" lvl="0" indent="-342900" algn="l" rtl="0">
+              <a:lnSpc>
+                <a:spcPct val="144000"/>
+              </a:lnSpc>
+              <a:spcBef>
+                <a:spcPts val="0"/>
+              </a:spcBef>
+              <a:spcAft>
+                <a:spcPts val="0"/>
+              </a:spcAft>
+              <a:buClr>
+                <a:srgbClr val="EAF7F5"/>
+              </a:buClr>
+              <a:buSzPts val="1250"/>
+              <a:buFont typeface="Calibri"/>
+              <a:buChar char="•"/>
+            </a:pPr>
+            <a:r>
+              <a:rPr lang="en-US" b="0" i="0" u="none" strike="noStrike" cap="none" dirty="0">
+                <a:solidFill>
+                  <a:srgbClr val="EAF7F5"/>
+                </a:solidFill>
+                <a:latin typeface="Calibri"/>
+                <a:ea typeface="Calibri"/>
+                <a:cs typeface="Calibri"/>
+                <a:sym typeface="Calibri"/>
+              </a:rPr>
+              <a:t>Each Key Vault or Managed HSM is yours alone — MHSM adds a customer-owned security domain for extra isolation</a:t>
+            </a:r>
+            <a:endParaRPr b="0" i="0" u="none" strike="noStrike" cap="none" dirty="0">
+              <a:solidFill>
+                <a:schemeClr val="dk1"/>
+              </a:solidFill>
+              <a:latin typeface="Calibri"/>
+              <a:ea typeface="Calibri"/>
+              <a:cs typeface="Calibri"/>
+              <a:sym typeface="Calibri"/>
+            </a:endParaRPr>
+          </a:p>
+          <a:p>
+            <a:pPr marL="342900" marR="0" lvl="0" indent="-342900" algn="l" rtl="0">
+              <a:lnSpc>
+                <a:spcPct val="144000"/>
+              </a:lnSpc>
+              <a:spcBef>
+                <a:spcPts val="0"/>
+              </a:spcBef>
+              <a:spcAft>
+                <a:spcPts val="0"/>
+              </a:spcAft>
+              <a:buClr>
+                <a:srgbClr val="EAF7F5"/>
+              </a:buClr>
+              <a:buSzPts val="1250"/>
+              <a:buFont typeface="Calibri"/>
+              <a:buChar char="•"/>
+            </a:pPr>
+            <a:r>
+              <a:rPr lang="en-US" b="0" i="0" u="none" strike="noStrike" cap="none" dirty="0">
+                <a:solidFill>
+                  <a:srgbClr val="EAF7F5"/>
+                </a:solidFill>
+                <a:latin typeface="Calibri"/>
+                <a:ea typeface="Calibri"/>
+                <a:cs typeface="Calibri"/>
+                <a:sym typeface="Calibri"/>
+              </a:rPr>
+              <a:t>You can revoke at any time</a:t>
+            </a:r>
+            <a:endParaRPr b="0" i="0" u="none" strike="noStrike" cap="none" dirty="0">
+              <a:solidFill>
+                <a:schemeClr val="dk1"/>
+              </a:solidFill>
+              <a:latin typeface="Calibri"/>
+              <a:ea typeface="Calibri"/>
+              <a:cs typeface="Calibri"/>
+              <a:sym typeface="Calibri"/>
+            </a:endParaRPr>
+          </a:p>
+        </p:txBody>
+      </p:sp>
+      <p:sp>
+        <p:nvSpPr>
+          <p:cNvPr id="225" name="Google Shape;225;p10"/>
+          <p:cNvSpPr/>
+          <p:nvPr/>
+        </p:nvSpPr>
+        <p:spPr>
+          <a:xfrm>
+            <a:off x="640080" y="5358384"/>
+            <a:ext cx="10881360" cy="978408"/>
+          </a:xfrm>
+          <a:prstGeom prst="roundRect">
+            <a:avLst>
+              <a:gd name="adj" fmla="val 7692"/>
+            </a:avLst>
+          </a:prstGeom>
+          <a:solidFill>
+            <a:srgbClr val="FBF2E0"/>
+          </a:solidFill>
+          <a:ln>
+            <a:noFill/>
+          </a:ln>
+        </p:spPr>
+        <p:txBody>
+          <a:bodyPr spcFirstLastPara="1" wrap="square" lIns="91425" tIns="91425" rIns="91425" bIns="91425" anchor="ctr" anchorCtr="0">
+            <a:noAutofit/>
+          </a:bodyPr>
+          <a:lstStyle/>
+          <a:p>
+            <a:pPr marL="0" lvl="0" indent="0" algn="l" rtl="0">
+              <a:spcBef>
+                <a:spcPts val="0"/>
+              </a:spcBef>
+              <a:spcAft>
+                <a:spcPts val="0"/>
+              </a:spcAft>
+              <a:buNone/>
+            </a:pPr>
+            <a:endParaRPr/>
+          </a:p>
+        </p:txBody>
+      </p:sp>
+      <p:sp>
+        <p:nvSpPr>
+          <p:cNvPr id="226" name="Google Shape;226;p10"/>
+          <p:cNvSpPr/>
+          <p:nvPr/>
+        </p:nvSpPr>
+        <p:spPr>
+          <a:xfrm>
+            <a:off x="914400" y="5522976"/>
+            <a:ext cx="10424160" cy="713232"/>
+          </a:xfrm>
+          <a:prstGeom prst="rect">
+            <a:avLst/>
+          </a:prstGeom>
+          <a:noFill/>
+          <a:ln>
+            <a:noFill/>
+          </a:ln>
+        </p:spPr>
+        <p:txBody>
+          <a:bodyPr spcFirstLastPara="1" wrap="square" lIns="0" tIns="0" rIns="0" bIns="0" anchor="ctr" anchorCtr="0">
+            <a:noAutofit/>
+          </a:bodyPr>
+          <a:lstStyle/>
+          <a:p>
+            <a:pPr marL="0" marR="0" lvl="0" indent="0" algn="l" rtl="0">
+              <a:lnSpc>
+                <a:spcPct val="128000"/>
+              </a:lnSpc>
+              <a:spcBef>
+                <a:spcPts val="0"/>
+              </a:spcBef>
+              <a:spcAft>
+                <a:spcPts val="0"/>
+              </a:spcAft>
+              <a:buClr>
+                <a:srgbClr val="E0A33E"/>
+              </a:buClr>
+              <a:buSzPts val="1250"/>
+              <a:buFont typeface="Calibri"/>
+              <a:buNone/>
+            </a:pPr>
+            <a:r>
+              <a:rPr lang="en-US" b="1" i="0" u="none" strike="noStrike" cap="none" dirty="0">
+                <a:solidFill>
+                  <a:srgbClr val="E0A33E"/>
+                </a:solidFill>
+                <a:latin typeface="Calibri"/>
+                <a:ea typeface="Calibri"/>
+                <a:cs typeface="Calibri"/>
+                <a:sym typeface="Calibri"/>
+              </a:rPr>
+              <a:t>The accurate framing:  </a:t>
+            </a:r>
+            <a:r>
+              <a:rPr lang="en-US" b="0" i="0" u="none" strike="noStrike" cap="none" dirty="0">
+                <a:solidFill>
+                  <a:srgbClr val="1B2A33"/>
+                </a:solidFill>
+                <a:latin typeface="Calibri"/>
+                <a:ea typeface="Calibri"/>
+                <a:cs typeface="Calibri"/>
+                <a:sym typeface="Calibri"/>
+              </a:rPr>
+              <a:t>the key sits in Microsoft's hardware, but is designed so Microsoft can't operationally reach it and you can pull the plug. CMK shifts the trust model; it doesn't remove Microsoft from the chain, the exact gap EUCS’s “high” tier tests for, and that gap narrows most on an HSM-backed tier.</a:t>
+            </a:r>
+            <a:endParaRPr b="0" i="0" u="none" strike="noStrike" cap="none" dirty="0">
+              <a:solidFill>
+                <a:schemeClr val="dk1"/>
+              </a:solidFill>
+              <a:latin typeface="Calibri"/>
+              <a:ea typeface="Calibri"/>
+              <a:cs typeface="Calibri"/>
+              <a:sym typeface="Calibri"/>
+            </a:endParaRPr>
+          </a:p>
+        </p:txBody>
+      </p:sp>
+      <p:sp>
+        <p:nvSpPr>
+          <p:cNvPr id="227" name="Google Shape;227;p10"/>
+          <p:cNvSpPr/>
+          <p:nvPr/>
+        </p:nvSpPr>
+        <p:spPr>
+          <a:xfrm>
+            <a:off x="640080" y="6446520"/>
+            <a:ext cx="7315200" cy="274320"/>
+          </a:xfrm>
+          <a:prstGeom prst="rect">
+            <a:avLst/>
+          </a:prstGeom>
+          <a:noFill/>
+          <a:ln>
+            <a:noFill/>
+          </a:ln>
+        </p:spPr>
+        <p:txBody>
+          <a:bodyPr spcFirstLastPara="1" wrap="square" lIns="0" tIns="0" rIns="0" bIns="0" anchor="ctr" anchorCtr="0">
+            <a:noAutofit/>
+          </a:bodyPr>
+          <a:lstStyle/>
+          <a:p>
+            <a:pPr marL="0" marR="0" lvl="0" indent="0" algn="l" rtl="0">
+              <a:spcBef>
+                <a:spcPts val="0"/>
+              </a:spcBef>
+              <a:spcAft>
+                <a:spcPts val="0"/>
+              </a:spcAft>
+              <a:buClr>
+                <a:srgbClr val="5B6B72"/>
+              </a:buClr>
+              <a:buSzPts val="900"/>
+              <a:buFont typeface="Calibri"/>
+              <a:buNone/>
+            </a:pPr>
+            <a:r>
+              <a:rPr lang="en-US" sz="900" b="0" i="0" u="none" strike="noStrike" cap="none">
+                <a:solidFill>
+                  <a:srgbClr val="5B6B72"/>
+                </a:solidFill>
+                <a:latin typeface="Calibri"/>
+                <a:ea typeface="Calibri"/>
+                <a:cs typeface="Calibri"/>
+                <a:sym typeface="Calibri"/>
+              </a:rPr>
+              <a:t>Customer-Managed Keys in Microsoft Fabric</a:t>
+            </a:r>
+            <a:endParaRPr sz="900" b="0" i="0" u="none" strike="noStrike" cap="none">
+              <a:solidFill>
+                <a:schemeClr val="dk1"/>
+              </a:solidFill>
+              <a:latin typeface="Calibri"/>
+              <a:ea typeface="Calibri"/>
+              <a:cs typeface="Calibri"/>
+              <a:sym typeface="Calibri"/>
+            </a:endParaRPr>
+          </a:p>
+        </p:txBody>
+      </p:sp>
+      <p:sp>
+        <p:nvSpPr>
+          <p:cNvPr id="228" name="Google Shape;228;p10"/>
+          <p:cNvSpPr/>
+          <p:nvPr/>
+        </p:nvSpPr>
+        <p:spPr>
+          <a:xfrm>
+            <a:off x="11338560" y="6446520"/>
+            <a:ext cx="365760" cy="274320"/>
+          </a:xfrm>
+          <a:prstGeom prst="rect">
+            <a:avLst/>
+          </a:prstGeom>
+          <a:noFill/>
+          <a:ln>
+            <a:noFill/>
+          </a:ln>
+        </p:spPr>
+        <p:txBody>
+          <a:bodyPr spcFirstLastPara="1" wrap="square" lIns="0" tIns="0" rIns="0" bIns="0" anchor="ctr" anchorCtr="0">
+            <a:noAutofit/>
+          </a:bodyPr>
+          <a:lstStyle/>
+          <a:p>
+            <a:pPr marL="0" marR="0" lvl="0" indent="0" algn="r" rtl="0">
+              <a:spcBef>
+                <a:spcPts val="0"/>
+              </a:spcBef>
+              <a:spcAft>
+                <a:spcPts val="0"/>
+              </a:spcAft>
+              <a:buClr>
+                <a:srgbClr val="5B6B72"/>
+              </a:buClr>
+              <a:buSzPts val="900"/>
+              <a:buFont typeface="Calibri"/>
+              <a:buNone/>
+            </a:pPr>
+            <a:r>
+              <a:rPr lang="en-US" sz="900" b="0" i="0" u="none" strike="noStrike" cap="none">
+                <a:solidFill>
+                  <a:srgbClr val="5B6B72"/>
+                </a:solidFill>
+                <a:latin typeface="Calibri"/>
+                <a:ea typeface="Calibri"/>
+                <a:cs typeface="Calibri"/>
+                <a:sym typeface="Calibri"/>
+              </a:rPr>
+              <a:t>9</a:t>
+            </a:r>
+            <a:endParaRPr sz="900" b="0" i="0" u="none" strike="noStrike" cap="none">
+              <a:solidFill>
+                <a:schemeClr val="dk1"/>
+              </a:solidFill>
+              <a:latin typeface="Calibri"/>
+              <a:ea typeface="Calibri"/>
+              <a:cs typeface="Calibri"/>
+              <a:sym typeface="Calibri"/>
+            </a:endParaRPr>
+          </a:p>
+        </p:txBody>
+      </p:sp>
+    </p:spTree>
+  </p:cSld>
+  <p:clrMapOvr>
+    <a:masterClrMapping/>
+  </p:clrMapOvr>
+</p:sld>
+</file>
+
+<file path=ppt/slides/slide11.xml><?xml version="1.0" encoding="utf-8"?>
+<p:sld xmlns:a="http://schemas.openxmlformats.org/drawingml/2006/main" xmlns:r="http://schemas.openxmlformats.org/officeDocument/2006/relationships" xmlns:p="http://schemas.openxmlformats.org/presentationml/2006/main">
+  <p:cSld>
+    <p:bg>
+      <p:bgPr>
+        <a:solidFill>
+          <a:srgbClr val="1B2A33"/>
+        </a:solidFill>
+        <a:effectLst/>
+      </p:bgPr>
+    </p:bg>
+    <p:spTree>
+      <p:nvGrpSpPr>
         <p:cNvPr id="1" name="Shape 233"/>
         <p:cNvGrpSpPr/>
         <p:nvPr/>
@@ -7199,420 +8341,6 @@
         </p:txBody>
       </p:sp>
     </p:spTree>
-  </p:cSld>
-  <p:clrMapOvr>
-    <a:masterClrMapping/>
-  </p:clrMapOvr>
-</p:sld>
-</file>
-
-<file path=ppt/slides/slide11.xml><?xml version="1.0" encoding="utf-8"?>
-<p:sld xmlns:a="http://schemas.openxmlformats.org/drawingml/2006/main" xmlns:r="http://schemas.openxmlformats.org/officeDocument/2006/relationships" xmlns:p="http://schemas.openxmlformats.org/presentationml/2006/main">
-  <p:cSld>
-    <p:spTree>
-      <p:nvGrpSpPr>
-        <p:cNvPr id="1" name="Shape 262"/>
-        <p:cNvGrpSpPr/>
-        <p:nvPr/>
-      </p:nvGrpSpPr>
-      <p:grpSpPr>
-        <a:xfrm>
-          <a:off x="0" y="0"/>
-          <a:ext cx="0" cy="0"/>
-          <a:chOff x="0" y="0"/>
-          <a:chExt cx="0" cy="0"/>
-        </a:xfrm>
-      </p:grpSpPr>
-      <p:sp>
-        <p:nvSpPr>
-          <p:cNvPr id="264" name="Google Shape;264;p12"/>
-          <p:cNvSpPr/>
-          <p:nvPr/>
-        </p:nvSpPr>
-        <p:spPr>
-          <a:xfrm>
-            <a:off x="640080" y="566928"/>
-            <a:ext cx="10972800" cy="822960"/>
-          </a:xfrm>
-          <a:prstGeom prst="rect">
-            <a:avLst/>
-          </a:prstGeom>
-          <a:noFill/>
-          <a:ln>
-            <a:noFill/>
-          </a:ln>
-        </p:spPr>
-        <p:txBody>
-          <a:bodyPr spcFirstLastPara="1" wrap="square" lIns="0" tIns="0" rIns="0" bIns="0" anchor="ctr" anchorCtr="0">
-            <a:noAutofit/>
-          </a:bodyPr>
-          <a:lstStyle/>
-          <a:p>
-            <a:pPr marL="0" marR="0" lvl="0" indent="0" algn="l" rtl="0">
-              <a:spcBef>
-                <a:spcPts val="0"/>
-              </a:spcBef>
-              <a:spcAft>
-                <a:spcPts val="0"/>
-              </a:spcAft>
-              <a:buClr>
-                <a:srgbClr val="1B2A33"/>
-              </a:buClr>
-              <a:buSzPts val="3200"/>
-              <a:buFont typeface="Cambria"/>
-              <a:buNone/>
-            </a:pPr>
-            <a:r>
-              <a:rPr lang="en-US" sz="3200" b="1" i="0" u="none" strike="noStrike" cap="none" dirty="0">
-                <a:solidFill>
-                  <a:srgbClr val="1B2A33"/>
-                </a:solidFill>
-                <a:latin typeface="Cambria"/>
-                <a:ea typeface="Cambria"/>
-                <a:cs typeface="Cambria"/>
-                <a:sym typeface="Cambria"/>
-              </a:rPr>
-              <a:t>This is what “blocked” actually looks like</a:t>
-            </a:r>
-            <a:endParaRPr sz="3200" b="0" i="0" u="none" strike="noStrike" cap="none" dirty="0">
-              <a:solidFill>
-                <a:schemeClr val="dk1"/>
-              </a:solidFill>
-              <a:latin typeface="Calibri"/>
-              <a:ea typeface="Calibri"/>
-              <a:cs typeface="Calibri"/>
-              <a:sym typeface="Calibri"/>
-            </a:endParaRPr>
-          </a:p>
-        </p:txBody>
-      </p:sp>
-      <p:sp>
-        <p:nvSpPr>
-          <p:cNvPr id="285" name="Google Shape;285;p12"/>
-          <p:cNvSpPr/>
-          <p:nvPr/>
-        </p:nvSpPr>
-        <p:spPr>
-          <a:xfrm>
-            <a:off x="640080" y="6446520"/>
-            <a:ext cx="7315200" cy="274320"/>
-          </a:xfrm>
-          <a:prstGeom prst="rect">
-            <a:avLst/>
-          </a:prstGeom>
-          <a:noFill/>
-          <a:ln>
-            <a:noFill/>
-          </a:ln>
-        </p:spPr>
-        <p:txBody>
-          <a:bodyPr spcFirstLastPara="1" wrap="square" lIns="0" tIns="0" rIns="0" bIns="0" anchor="ctr" anchorCtr="0">
-            <a:noAutofit/>
-          </a:bodyPr>
-          <a:lstStyle/>
-          <a:p>
-            <a:pPr marL="0" marR="0" lvl="0" indent="0" algn="l" rtl="0">
-              <a:spcBef>
-                <a:spcPts val="0"/>
-              </a:spcBef>
-              <a:spcAft>
-                <a:spcPts val="0"/>
-              </a:spcAft>
-              <a:buClr>
-                <a:srgbClr val="5B6B72"/>
-              </a:buClr>
-              <a:buSzPts val="900"/>
-              <a:buFont typeface="Calibri"/>
-              <a:buNone/>
-            </a:pPr>
-            <a:r>
-              <a:rPr lang="en-US" sz="900" b="0" i="0" u="none" strike="noStrike" cap="none">
-                <a:solidFill>
-                  <a:srgbClr val="5B6B72"/>
-                </a:solidFill>
-                <a:latin typeface="Calibri"/>
-                <a:ea typeface="Calibri"/>
-                <a:cs typeface="Calibri"/>
-                <a:sym typeface="Calibri"/>
-              </a:rPr>
-              <a:t>Customer-Managed Keys in Microsoft Fabric</a:t>
-            </a:r>
-            <a:endParaRPr sz="900" b="0" i="0" u="none" strike="noStrike" cap="none">
-              <a:solidFill>
-                <a:schemeClr val="dk1"/>
-              </a:solidFill>
-              <a:latin typeface="Calibri"/>
-              <a:ea typeface="Calibri"/>
-              <a:cs typeface="Calibri"/>
-              <a:sym typeface="Calibri"/>
-            </a:endParaRPr>
-          </a:p>
-        </p:txBody>
-      </p:sp>
-      <p:sp>
-        <p:nvSpPr>
-          <p:cNvPr id="286" name="Google Shape;286;p12"/>
-          <p:cNvSpPr/>
-          <p:nvPr/>
-        </p:nvSpPr>
-        <p:spPr>
-          <a:xfrm>
-            <a:off x="11338560" y="6446520"/>
-            <a:ext cx="365760" cy="274320"/>
-          </a:xfrm>
-          <a:prstGeom prst="rect">
-            <a:avLst/>
-          </a:prstGeom>
-          <a:noFill/>
-          <a:ln>
-            <a:noFill/>
-          </a:ln>
-        </p:spPr>
-        <p:txBody>
-          <a:bodyPr spcFirstLastPara="1" wrap="square" lIns="0" tIns="0" rIns="0" bIns="0" anchor="ctr" anchorCtr="0">
-            <a:noAutofit/>
-          </a:bodyPr>
-          <a:lstStyle/>
-          <a:p>
-            <a:pPr marL="0" marR="0" lvl="0" indent="0" algn="r" rtl="0">
-              <a:spcBef>
-                <a:spcPts val="0"/>
-              </a:spcBef>
-              <a:spcAft>
-                <a:spcPts val="0"/>
-              </a:spcAft>
-              <a:buClr>
-                <a:srgbClr val="5B6B72"/>
-              </a:buClr>
-              <a:buSzPts val="900"/>
-              <a:buFont typeface="Calibri"/>
-              <a:buNone/>
-            </a:pPr>
-            <a:r>
-              <a:rPr lang="en-US" sz="900" b="0" i="0" u="none" strike="noStrike" cap="none">
-                <a:solidFill>
-                  <a:srgbClr val="5B6B72"/>
-                </a:solidFill>
-                <a:latin typeface="Calibri"/>
-                <a:ea typeface="Calibri"/>
-                <a:cs typeface="Calibri"/>
-                <a:sym typeface="Calibri"/>
-              </a:rPr>
-              <a:t>11</a:t>
-            </a:r>
-            <a:endParaRPr sz="900" b="0" i="0" u="none" strike="noStrike" cap="none">
-              <a:solidFill>
-                <a:schemeClr val="dk1"/>
-              </a:solidFill>
-              <a:latin typeface="Calibri"/>
-              <a:ea typeface="Calibri"/>
-              <a:cs typeface="Calibri"/>
-              <a:sym typeface="Calibri"/>
-            </a:endParaRPr>
-          </a:p>
-        </p:txBody>
-      </p:sp>
-      <p:sp>
-        <p:nvSpPr>
-          <p:cNvPr id="2" name="Google Shape;292;p13">
-            <a:extLst>
-              <a:ext uri="{FF2B5EF4-FFF2-40B4-BE49-F238E27FC236}">
-                <a16:creationId xmlns:a16="http://schemas.microsoft.com/office/drawing/2014/main" id="{4717665D-BD21-14F7-DF15-58020BEF12A4}"/>
-              </a:ext>
-            </a:extLst>
-          </p:cNvPr>
-          <p:cNvSpPr/>
-          <p:nvPr/>
-        </p:nvSpPr>
-        <p:spPr>
-          <a:xfrm>
-            <a:off x="640080" y="548640"/>
-            <a:ext cx="5486400" cy="274320"/>
-          </a:xfrm>
-          <a:prstGeom prst="rect">
-            <a:avLst/>
-          </a:prstGeom>
-          <a:noFill/>
-          <a:ln>
-            <a:noFill/>
-          </a:ln>
-        </p:spPr>
-        <p:txBody>
-          <a:bodyPr spcFirstLastPara="1" wrap="square" lIns="0" tIns="0" rIns="0" bIns="0" anchor="ctr" anchorCtr="0">
-            <a:noAutofit/>
-          </a:bodyPr>
-          <a:lstStyle/>
-          <a:p>
-            <a:pPr marL="0" marR="0" lvl="0" indent="0" algn="l" rtl="0">
-              <a:spcBef>
-                <a:spcPts val="0"/>
-              </a:spcBef>
-              <a:spcAft>
-                <a:spcPts val="0"/>
-              </a:spcAft>
-              <a:buClr>
-                <a:srgbClr val="0E7C7B"/>
-              </a:buClr>
-              <a:buSzPts val="1200"/>
-              <a:buFont typeface="Calibri"/>
-              <a:buNone/>
-            </a:pPr>
-            <a:r>
-              <a:rPr lang="en-US" sz="1200" b="1" dirty="0">
-                <a:solidFill>
-                  <a:srgbClr val="0E7C7B"/>
-                </a:solidFill>
-                <a:latin typeface="Calibri"/>
-                <a:ea typeface="Calibri"/>
-                <a:cs typeface="Calibri"/>
-                <a:sym typeface="Calibri"/>
-              </a:rPr>
-              <a:t>THE KILL SWITCH, CONFIRMED</a:t>
-            </a:r>
-            <a:endParaRPr sz="1200" b="0" i="0" u="none" strike="noStrike" cap="none" dirty="0">
-              <a:solidFill>
-                <a:schemeClr val="dk1"/>
-              </a:solidFill>
-              <a:latin typeface="Calibri"/>
-              <a:ea typeface="Calibri"/>
-              <a:cs typeface="Calibri"/>
-              <a:sym typeface="Calibri"/>
-            </a:endParaRPr>
-          </a:p>
-        </p:txBody>
-      </p:sp>
-      <p:pic>
-        <p:nvPicPr>
-          <p:cNvPr id="3" name="Picture 2">
-            <a:extLst>
-              <a:ext uri="{FF2B5EF4-FFF2-40B4-BE49-F238E27FC236}">
-                <a16:creationId xmlns:a16="http://schemas.microsoft.com/office/drawing/2014/main" id="{E2A25F63-0F8C-7FD4-DF0E-62C52DA604C2}"/>
-              </a:ext>
-            </a:extLst>
-          </p:cNvPr>
-          <p:cNvPicPr>
-            <a:picLocks noChangeAspect="1"/>
-          </p:cNvPicPr>
-          <p:nvPr/>
-        </p:nvPicPr>
-        <p:blipFill>
-          <a:blip r:embed="rId3"/>
-          <a:stretch>
-            <a:fillRect/>
-          </a:stretch>
-        </p:blipFill>
-        <p:spPr>
-          <a:xfrm>
-            <a:off x="1752600" y="1470660"/>
-            <a:ext cx="8686800" cy="4089934"/>
-          </a:xfrm>
-          <a:prstGeom prst="rect">
-            <a:avLst/>
-          </a:prstGeom>
-          <a:ln w="9525">
-            <a:solidFill>
-              <a:srgbClr val="D7E0DF"/>
-            </a:solidFill>
-          </a:ln>
-          <a:effectLst>
-            <a:outerShdw blurRad="88900" dist="25400" dir="5400000" algn="bl" rotWithShape="0">
-              <a:srgbClr val="000000">
-                <a:alpha val="16000"/>
-              </a:srgbClr>
-            </a:outerShdw>
-          </a:effectLst>
-        </p:spPr>
-      </p:pic>
-      <p:sp>
-        <p:nvSpPr>
-          <p:cNvPr id="900" name="CaptionBlock"/>
-          <p:cNvSpPr/>
-          <p:nvPr/>
-        </p:nvSpPr>
-        <p:spPr>
-          <a:xfrm>
-            <a:off x="1752600" y="5610594"/>
-            <a:ext cx="8686800" cy="731520"/>
-          </a:xfrm>
-          <a:prstGeom prst="rect">
-            <a:avLst/>
-          </a:prstGeom>
-          <a:noFill/>
-          <a:ln>
-            <a:noFill/>
-          </a:ln>
-        </p:spPr>
-        <p:txBody>
-          <a:bodyPr spcFirstLastPara="1" wrap="square" lIns="0" tIns="0" rIns="0" bIns="0" anchor="t" anchorCtr="0">
-            <a:noAutofit/>
-          </a:bodyPr>
-          <a:lstStyle/>
-          <a:p>
-            <a:pPr marL="0" marR="0" lvl="0" indent="0" algn="l" rtl="0">
-              <a:spcBef>
-                <a:spcPts val="0"/>
-              </a:spcBef>
-              <a:spcAft>
-                <a:spcPts val="0"/>
-              </a:spcAft>
-              <a:buNone/>
-            </a:pPr>
-            <a:r>
-              <a:rPr lang="en-US" sz="1100" b="0" i="1" u="none" strike="noStrike" cap="none" dirty="0">
-                <a:solidFill>
-                  <a:srgbClr val="5B6B72"/>
-                </a:solidFill>
-                <a:latin typeface="Calibri"/>
-                <a:ea typeface="Calibri"/>
-                <a:cs typeface="Calibri"/>
-                <a:sym typeface="Calibri"/>
-              </a:rPr>
-              <a:t>Workspace A, revoked days earlier — a live notebook run against Fabric, not a recording.</a:t>
-            </a:r>
-          </a:p>
-          <a:p>
-            <a:pPr marL="0" marR="0" lvl="0" indent="0" algn="l" rtl="0">
-              <a:spcBef>
-                <a:spcPts val="200"/>
-              </a:spcBef>
-              <a:spcAft>
-                <a:spcPts val="0"/>
-              </a:spcAft>
-              <a:buNone/>
-            </a:pPr>
-            <a:r>
-              <a:rPr lang="en-US" sz="1150" b="1" i="0" u="none" strike="noStrike" cap="none" dirty="0">
-                <a:solidFill>
-                  <a:srgbClr val="0E7C7B"/>
-                </a:solidFill>
-                <a:latin typeface="Consolas"/>
-                <a:ea typeface="Consolas"/>
-                <a:cs typeface="Consolas"/>
-                <a:sym typeface="Consolas"/>
-              </a:rPr>
-              <a:t>KeyVaultEncryptionKeyNotFound</a:t>
-            </a:r>
-            <a:r>
-              <a:rPr lang="en-US" sz="1150" b="0" i="0" u="none" strike="noStrike" cap="none" dirty="0">
-                <a:solidFill>
-                  <a:srgbClr val="1B2A33"/>
-                </a:solidFill>
-                <a:latin typeface="Calibri"/>
-                <a:ea typeface="Calibri"/>
-                <a:cs typeface="Calibri"/>
-                <a:sym typeface="Calibri"/>
-              </a:rPr>
-              <a:t> — “the key vault key is not found to unwrap the encryption key.”</a:t>
-            </a:r>
-          </a:p>
-        </p:txBody>
-      </p:sp>
-    </p:spTree>
-    <p:extLst>
-      <p:ext uri="{BB962C8B-B14F-4D97-AF65-F5344CB8AC3E}">
-        <p14:creationId xmlns:p14="http://schemas.microsoft.com/office/powerpoint/2010/main" val="468602749"/>
-      </p:ext>
-    </p:extLst>
   </p:cSld>
   <p:clrMapOvr>
     <a:masterClrMapping/>
@@ -7686,7 +8414,7 @@
                 <a:cs typeface="Cambria"/>
                 <a:sym typeface="Cambria"/>
               </a:rPr>
-              <a:t>The log confirms use — not who, or which workspace</a:t>
+              <a:t>This is what “blocked” actually looks like</a:t>
             </a:r>
             <a:endParaRPr sz="3200" b="0" i="0" u="none" strike="noStrike" cap="none" dirty="0">
               <a:solidFill>
@@ -7812,7 +8540,7 @@
                 <a:cs typeface="Calibri"/>
                 <a:sym typeface="Calibri"/>
               </a:rPr>
-              <a:t>12</a:t>
+              <a:t>11</a:t>
             </a:r>
             <a:endParaRPr sz="900" b="0" i="0" u="none" strike="noStrike" cap="none">
               <a:solidFill>
@@ -7872,7 +8600,7 @@
               <a:buNone/>
             </a:pPr>
             <a:r>
-              <a:rPr lang="en-US" sz="1200" b="1" i="0" u="none" strike="noStrike" cap="none" dirty="0">
+              <a:rPr lang="en-US" sz="1200" b="1" dirty="0">
                 <a:solidFill>
                   <a:srgbClr val="0E7C7B"/>
                 </a:solidFill>
@@ -7881,7 +8609,7 @@
                 <a:cs typeface="Calibri"/>
                 <a:sym typeface="Calibri"/>
               </a:rPr>
-              <a:t>PROOF OF USE, NOT PROOF OF WHO</a:t>
+              <a:t>THE KILL SWITCH, CONFIRMED</a:t>
             </a:r>
             <a:endParaRPr sz="1200" b="0" i="0" u="none" strike="noStrike" cap="none" dirty="0">
               <a:solidFill>
@@ -7895,6 +8623,48 @@
           </a:p>
         </p:txBody>
       </p:sp>
+      <p:pic>
+        <p:nvPicPr>
+          <p:cNvPr id="3" name="Picture 2">
+            <a:extLst>
+              <a:ext uri="{FF2B5EF4-FFF2-40B4-BE49-F238E27FC236}">
+                <a16:creationId xmlns:a16="http://schemas.microsoft.com/office/drawing/2014/main" id="{E2A25F63-0F8C-7FD4-DF0E-62C52DA604C2}"/>
+              </a:ext>
+            </a:extLst>
+          </p:cNvPr>
+          <p:cNvPicPr>
+            <a:picLocks noChangeAspect="1"/>
+          </p:cNvPicPr>
+          <p:nvPr/>
+        </p:nvPicPr>
+        <p:blipFill>
+          <a:blip r:embed="rId3"/>
+          <a:stretch>
+            <a:fillRect/>
+          </a:stretch>
+        </p:blipFill>
+        <p:spPr>
+          <a:xfrm>
+            <a:off x="1752600" y="1470660"/>
+            <a:ext cx="8686800" cy="4089934"/>
+          </a:xfrm>
+          <a:prstGeom prst="rect">
+            <a:avLst/>
+          </a:prstGeom>
+          <a:ln w="9525">
+            <a:solidFill>
+              <a:srgbClr val="D7E0DF"/>
+            </a:solidFill>
+          </a:ln>
+          <a:effectLst>
+            <a:outerShdw blurRad="88900" dist="25400" dir="5400000" algn="bl" rotWithShape="0">
+              <a:srgbClr val="000000">
+                <a:alpha val="16000"/>
+              </a:srgbClr>
+            </a:outerShdw>
+          </a:effectLst>
+        </p:spPr>
+      </p:pic>
       <p:sp>
         <p:nvSpPr>
           <p:cNvPr id="900" name="CaptionBlock"/>
@@ -7903,7 +8673,379 @@
         </p:nvSpPr>
         <p:spPr>
           <a:xfrm>
-            <a:off x="1752600" y="5766000"/>
+            <a:off x="1752600" y="5610594"/>
+            <a:ext cx="8686800" cy="731520"/>
+          </a:xfrm>
+          <a:prstGeom prst="rect">
+            <a:avLst/>
+          </a:prstGeom>
+          <a:noFill/>
+          <a:ln>
+            <a:noFill/>
+          </a:ln>
+        </p:spPr>
+        <p:txBody>
+          <a:bodyPr spcFirstLastPara="1" wrap="square" lIns="0" tIns="0" rIns="0" bIns="0" anchor="t" anchorCtr="0">
+            <a:noAutofit/>
+          </a:bodyPr>
+          <a:lstStyle/>
+          <a:p>
+            <a:pPr marL="0" marR="0" lvl="0" indent="0" algn="l" rtl="0">
+              <a:spcBef>
+                <a:spcPts val="0"/>
+              </a:spcBef>
+              <a:spcAft>
+                <a:spcPts val="0"/>
+              </a:spcAft>
+              <a:buNone/>
+            </a:pPr>
+            <a:r>
+              <a:rPr lang="en-US" sz="1100" b="0" i="1" u="none" strike="noStrike" cap="none" dirty="0">
+                <a:solidFill>
+                  <a:srgbClr val="5B6B72"/>
+                </a:solidFill>
+                <a:latin typeface="Calibri"/>
+                <a:ea typeface="Calibri"/>
+                <a:cs typeface="Calibri"/>
+                <a:sym typeface="Calibri"/>
+              </a:rPr>
+              <a:t>Workspace A, revoked days earlier — a live notebook run against Fabric, not a recording.</a:t>
+            </a:r>
+          </a:p>
+          <a:p>
+            <a:pPr marL="0" marR="0" lvl="0" indent="0" algn="l" rtl="0">
+              <a:spcBef>
+                <a:spcPts val="200"/>
+              </a:spcBef>
+              <a:spcAft>
+                <a:spcPts val="0"/>
+              </a:spcAft>
+              <a:buNone/>
+            </a:pPr>
+            <a:r>
+              <a:rPr lang="en-US" sz="1150" b="1" i="0" u="none" strike="noStrike" cap="none" dirty="0">
+                <a:solidFill>
+                  <a:srgbClr val="0E7C7B"/>
+                </a:solidFill>
+                <a:latin typeface="Consolas"/>
+                <a:ea typeface="Consolas"/>
+                <a:cs typeface="Consolas"/>
+                <a:sym typeface="Consolas"/>
+              </a:rPr>
+              <a:t>KeyVaultEncryptionKeyNotFound</a:t>
+            </a:r>
+            <a:r>
+              <a:rPr lang="en-US" sz="1150" b="0" i="0" u="none" strike="noStrike" cap="none" dirty="0">
+                <a:solidFill>
+                  <a:srgbClr val="1B2A33"/>
+                </a:solidFill>
+                <a:latin typeface="Calibri"/>
+                <a:ea typeface="Calibri"/>
+                <a:cs typeface="Calibri"/>
+                <a:sym typeface="Calibri"/>
+              </a:rPr>
+              <a:t> — “the key vault key is not found to unwrap the encryption key.”</a:t>
+            </a:r>
+          </a:p>
+        </p:txBody>
+      </p:sp>
+    </p:spTree>
+    <p:extLst>
+      <p:ext uri="{BB962C8B-B14F-4D97-AF65-F5344CB8AC3E}">
+        <p14:creationId xmlns:p14="http://schemas.microsoft.com/office/powerpoint/2010/main" val="468602749"/>
+      </p:ext>
+    </p:extLst>
+  </p:cSld>
+  <p:clrMapOvr>
+    <a:masterClrMapping/>
+  </p:clrMapOvr>
+</p:sld>
+</file>
+
+<file path=ppt/slides/slide13.xml><?xml version="1.0" encoding="utf-8"?>
+<p:sld xmlns:a="http://schemas.openxmlformats.org/drawingml/2006/main" xmlns:r="http://schemas.openxmlformats.org/officeDocument/2006/relationships" xmlns:p="http://schemas.openxmlformats.org/presentationml/2006/main">
+  <p:cSld>
+    <p:spTree>
+      <p:nvGrpSpPr>
+        <p:cNvPr id="1" name="Shape 262"/>
+        <p:cNvGrpSpPr/>
+        <p:nvPr/>
+      </p:nvGrpSpPr>
+      <p:grpSpPr>
+        <a:xfrm>
+          <a:off x="0" y="0"/>
+          <a:ext cx="0" cy="0"/>
+          <a:chOff x="0" y="0"/>
+          <a:chExt cx="0" cy="0"/>
+        </a:xfrm>
+      </p:grpSpPr>
+      <p:sp>
+        <p:nvSpPr>
+          <p:cNvPr id="264" name="Google Shape;264;p12"/>
+          <p:cNvSpPr/>
+          <p:nvPr/>
+        </p:nvSpPr>
+        <p:spPr>
+          <a:xfrm>
+            <a:off x="640080" y="566928"/>
+            <a:ext cx="10972800" cy="822960"/>
+          </a:xfrm>
+          <a:prstGeom prst="rect">
+            <a:avLst/>
+          </a:prstGeom>
+          <a:noFill/>
+          <a:ln>
+            <a:noFill/>
+          </a:ln>
+        </p:spPr>
+        <p:txBody>
+          <a:bodyPr spcFirstLastPara="1" wrap="square" lIns="0" tIns="0" rIns="0" bIns="0" anchor="ctr" anchorCtr="0">
+            <a:noAutofit/>
+          </a:bodyPr>
+          <a:lstStyle/>
+          <a:p>
+            <a:pPr marL="0" marR="0" lvl="0" indent="0" algn="l" rtl="0">
+              <a:spcBef>
+                <a:spcPts val="0"/>
+              </a:spcBef>
+              <a:spcAft>
+                <a:spcPts val="0"/>
+              </a:spcAft>
+              <a:buClr>
+                <a:srgbClr val="1B2A33"/>
+              </a:buClr>
+              <a:buSzPts val="3200"/>
+              <a:buFont typeface="Cambria"/>
+              <a:buNone/>
+            </a:pPr>
+            <a:r>
+              <a:rPr lang="en-US" sz="3200" b="1" i="0" u="none" strike="noStrike" cap="none" dirty="0">
+                <a:solidFill>
+                  <a:srgbClr val="1B2A33"/>
+                </a:solidFill>
+                <a:latin typeface="Cambria"/>
+                <a:ea typeface="Cambria"/>
+                <a:cs typeface="Cambria"/>
+                <a:sym typeface="Cambria"/>
+              </a:rPr>
+              <a:t>The log confirms use — not who, or which workspace</a:t>
+            </a:r>
+            <a:endParaRPr sz="3200" b="0" i="0" u="none" strike="noStrike" cap="none" dirty="0">
+              <a:solidFill>
+                <a:schemeClr val="dk1"/>
+              </a:solidFill>
+              <a:latin typeface="Calibri"/>
+              <a:ea typeface="Calibri"/>
+              <a:cs typeface="Calibri"/>
+              <a:sym typeface="Calibri"/>
+            </a:endParaRPr>
+          </a:p>
+        </p:txBody>
+      </p:sp>
+      <p:sp>
+        <p:nvSpPr>
+          <p:cNvPr id="285" name="Google Shape;285;p12"/>
+          <p:cNvSpPr/>
+          <p:nvPr/>
+        </p:nvSpPr>
+        <p:spPr>
+          <a:xfrm>
+            <a:off x="640080" y="6446520"/>
+            <a:ext cx="7315200" cy="274320"/>
+          </a:xfrm>
+          <a:prstGeom prst="rect">
+            <a:avLst/>
+          </a:prstGeom>
+          <a:noFill/>
+          <a:ln>
+            <a:noFill/>
+          </a:ln>
+        </p:spPr>
+        <p:txBody>
+          <a:bodyPr spcFirstLastPara="1" wrap="square" lIns="0" tIns="0" rIns="0" bIns="0" anchor="ctr" anchorCtr="0">
+            <a:noAutofit/>
+          </a:bodyPr>
+          <a:lstStyle/>
+          <a:p>
+            <a:pPr marL="0" marR="0" lvl="0" indent="0" algn="l" rtl="0">
+              <a:spcBef>
+                <a:spcPts val="0"/>
+              </a:spcBef>
+              <a:spcAft>
+                <a:spcPts val="0"/>
+              </a:spcAft>
+              <a:buClr>
+                <a:srgbClr val="5B6B72"/>
+              </a:buClr>
+              <a:buSzPts val="900"/>
+              <a:buFont typeface="Calibri"/>
+              <a:buNone/>
+            </a:pPr>
+            <a:r>
+              <a:rPr lang="en-US" sz="900" b="0" i="0" u="none" strike="noStrike" cap="none">
+                <a:solidFill>
+                  <a:srgbClr val="5B6B72"/>
+                </a:solidFill>
+                <a:latin typeface="Calibri"/>
+                <a:ea typeface="Calibri"/>
+                <a:cs typeface="Calibri"/>
+                <a:sym typeface="Calibri"/>
+              </a:rPr>
+              <a:t>Customer-Managed Keys in Microsoft Fabric</a:t>
+            </a:r>
+            <a:endParaRPr sz="900" b="0" i="0" u="none" strike="noStrike" cap="none">
+              <a:solidFill>
+                <a:schemeClr val="dk1"/>
+              </a:solidFill>
+              <a:latin typeface="Calibri"/>
+              <a:ea typeface="Calibri"/>
+              <a:cs typeface="Calibri"/>
+              <a:sym typeface="Calibri"/>
+            </a:endParaRPr>
+          </a:p>
+        </p:txBody>
+      </p:sp>
+      <p:sp>
+        <p:nvSpPr>
+          <p:cNvPr id="286" name="Google Shape;286;p12"/>
+          <p:cNvSpPr/>
+          <p:nvPr/>
+        </p:nvSpPr>
+        <p:spPr>
+          <a:xfrm>
+            <a:off x="11338560" y="6446520"/>
+            <a:ext cx="365760" cy="274320"/>
+          </a:xfrm>
+          <a:prstGeom prst="rect">
+            <a:avLst/>
+          </a:prstGeom>
+          <a:noFill/>
+          <a:ln>
+            <a:noFill/>
+          </a:ln>
+        </p:spPr>
+        <p:txBody>
+          <a:bodyPr spcFirstLastPara="1" wrap="square" lIns="0" tIns="0" rIns="0" bIns="0" anchor="ctr" anchorCtr="0">
+            <a:noAutofit/>
+          </a:bodyPr>
+          <a:lstStyle/>
+          <a:p>
+            <a:pPr marL="0" marR="0" lvl="0" indent="0" algn="r" rtl="0">
+              <a:spcBef>
+                <a:spcPts val="0"/>
+              </a:spcBef>
+              <a:spcAft>
+                <a:spcPts val="0"/>
+              </a:spcAft>
+              <a:buClr>
+                <a:srgbClr val="5B6B72"/>
+              </a:buClr>
+              <a:buSzPts val="900"/>
+              <a:buFont typeface="Calibri"/>
+              <a:buNone/>
+            </a:pPr>
+            <a:r>
+              <a:rPr lang="en-US" sz="900" b="0" i="0" u="none" strike="noStrike" cap="none">
+                <a:solidFill>
+                  <a:srgbClr val="5B6B72"/>
+                </a:solidFill>
+                <a:latin typeface="Calibri"/>
+                <a:ea typeface="Calibri"/>
+                <a:cs typeface="Calibri"/>
+                <a:sym typeface="Calibri"/>
+              </a:rPr>
+              <a:t>12</a:t>
+            </a:r>
+            <a:endParaRPr sz="900" b="0" i="0" u="none" strike="noStrike" cap="none">
+              <a:solidFill>
+                <a:schemeClr val="dk1"/>
+              </a:solidFill>
+              <a:latin typeface="Calibri"/>
+              <a:ea typeface="Calibri"/>
+              <a:cs typeface="Calibri"/>
+              <a:sym typeface="Calibri"/>
+            </a:endParaRPr>
+          </a:p>
+        </p:txBody>
+      </p:sp>
+      <p:sp>
+        <p:nvSpPr>
+          <p:cNvPr id="2" name="Google Shape;292;p13">
+            <a:extLst>
+              <a:ext uri="{FF2B5EF4-FFF2-40B4-BE49-F238E27FC236}">
+                <a16:creationId xmlns:a16="http://schemas.microsoft.com/office/drawing/2014/main" id="{4717665D-BD21-14F7-DF15-58020BEF12A4}"/>
+              </a:ext>
+            </a:extLst>
+          </p:cNvPr>
+          <p:cNvSpPr/>
+          <p:nvPr/>
+        </p:nvSpPr>
+        <p:spPr>
+          <a:xfrm>
+            <a:off x="640080" y="548640"/>
+            <a:ext cx="5486400" cy="274320"/>
+          </a:xfrm>
+          <a:prstGeom prst="rect">
+            <a:avLst/>
+          </a:prstGeom>
+          <a:noFill/>
+          <a:ln>
+            <a:noFill/>
+          </a:ln>
+        </p:spPr>
+        <p:txBody>
+          <a:bodyPr spcFirstLastPara="1" wrap="square" lIns="0" tIns="0" rIns="0" bIns="0" anchor="ctr" anchorCtr="0">
+            <a:noAutofit/>
+          </a:bodyPr>
+          <a:lstStyle/>
+          <a:p>
+            <a:pPr marL="0" marR="0" lvl="0" indent="0" algn="l" rtl="0">
+              <a:spcBef>
+                <a:spcPts val="0"/>
+              </a:spcBef>
+              <a:spcAft>
+                <a:spcPts val="0"/>
+              </a:spcAft>
+              <a:buClr>
+                <a:srgbClr val="0E7C7B"/>
+              </a:buClr>
+              <a:buSzPts val="1200"/>
+              <a:buFont typeface="Calibri"/>
+              <a:buNone/>
+            </a:pPr>
+            <a:r>
+              <a:rPr lang="en-US" sz="1200" b="1" i="0" u="none" strike="noStrike" cap="none" dirty="0">
+                <a:solidFill>
+                  <a:srgbClr val="0E7C7B"/>
+                </a:solidFill>
+                <a:latin typeface="Calibri"/>
+                <a:ea typeface="Calibri"/>
+                <a:cs typeface="Calibri"/>
+                <a:sym typeface="Calibri"/>
+              </a:rPr>
+              <a:t>PROOF OF USE, NOT PROOF OF WHO</a:t>
+            </a:r>
+            <a:endParaRPr sz="1200" b="0" i="0" u="none" strike="noStrike" cap="none" dirty="0">
+              <a:solidFill>
+                <a:schemeClr val="dk1"/>
+              </a:solidFill>
+              <a:latin typeface="Calibri"/>
+              <a:ea typeface="Calibri"/>
+              <a:cs typeface="Calibri"/>
+              <a:sym typeface="Calibri"/>
+            </a:endParaRPr>
+          </a:p>
+        </p:txBody>
+      </p:sp>
+      <p:sp>
+        <p:nvSpPr>
+          <p:cNvPr id="900" name="CaptionBlock"/>
+          <p:cNvSpPr/>
+          <p:nvPr/>
+        </p:nvSpPr>
+        <p:spPr>
+          <a:xfrm>
+            <a:off x="1752600" y="5664200"/>
             <a:ext cx="8686800" cy="731520"/>
           </a:xfrm>
           <a:prstGeom prst="rect">
@@ -8226,7 +9368,7 @@
 </p:sld>
 </file>
 
-<file path=ppt/slides/slide13.xml><?xml version="1.0" encoding="utf-8"?>
+<file path=ppt/slides/slide14.xml><?xml version="1.0" encoding="utf-8"?>
 <p:sld xmlns:a="http://schemas.openxmlformats.org/drawingml/2006/main" xmlns:r="http://schemas.openxmlformats.org/officeDocument/2006/relationships" xmlns:p="http://schemas.openxmlformats.org/presentationml/2006/main">
   <p:cSld>
     <p:bg>
@@ -9604,7 +10746,7 @@
 </p:sld>
 </file>
 
-<file path=ppt/slides/slide14.xml><?xml version="1.0" encoding="utf-8"?>
+<file path=ppt/slides/slide15.xml><?xml version="1.0" encoding="utf-8"?>
 <p:sld xmlns:a="http://schemas.openxmlformats.org/drawingml/2006/main" xmlns:r="http://schemas.openxmlformats.org/officeDocument/2006/relationships" xmlns:p="http://schemas.openxmlformats.org/presentationml/2006/main">
   <p:cSld>
     <p:bg>
@@ -10985,7 +12127,7 @@
 </p:sld>
 </file>
 
-<file path=ppt/slides/slide15.xml><?xml version="1.0" encoding="utf-8"?>
+<file path=ppt/slides/slide16.xml><?xml version="1.0" encoding="utf-8"?>
 <p:sld xmlns:a="http://schemas.openxmlformats.org/drawingml/2006/main" xmlns:r="http://schemas.openxmlformats.org/officeDocument/2006/relationships" xmlns:p="http://schemas.openxmlformats.org/presentationml/2006/main">
   <p:cSld>
     <p:bg>
@@ -12390,10 +13532,10 @@
       </p:sp>
       <p:pic>
         <p:nvPicPr>
-          <p:cNvPr id="2" name="Google Shape;91;p5" descr="preencoded.png">
+          <p:cNvPr id="3" name="Google Shape;91;p5" descr="preencoded.png">
             <a:extLst>
               <a:ext uri="{FF2B5EF4-FFF2-40B4-BE49-F238E27FC236}">
-                <a16:creationId xmlns:a16="http://schemas.microsoft.com/office/drawing/2014/main" id="{5F4C1F7B-7EB6-41AB-76C7-C2E17343EC54}"/>
+                <a16:creationId xmlns:a16="http://schemas.microsoft.com/office/drawing/2014/main" id="{C80DE74D-AD7D-EA09-7174-64D85D17AEFC}"/>
               </a:ext>
             </a:extLst>
           </p:cNvPr>
@@ -12409,7 +13551,7 @@
         </p:blipFill>
         <p:spPr>
           <a:xfrm>
-            <a:off x="1106424" y="5170279"/>
+            <a:off x="1105593" y="5145993"/>
             <a:ext cx="365760" cy="365760"/>
           </a:xfrm>
           <a:prstGeom prst="rect">
@@ -12429,7 +13571,7 @@
 </p:sld>
 </file>
 
-<file path=ppt/slides/slide16.xml><?xml version="1.0" encoding="utf-8"?>
+<file path=ppt/slides/slide17.xml><?xml version="1.0" encoding="utf-8"?>
 <p:sld xmlns:a="http://schemas.openxmlformats.org/drawingml/2006/main" xmlns:r="http://schemas.openxmlformats.org/officeDocument/2006/relationships" xmlns:p="http://schemas.openxmlformats.org/presentationml/2006/main">
   <p:cSld>
     <p:bg>
@@ -13988,7 +15130,7 @@
 </p:sld>
 </file>
 
-<file path=ppt/slides/slide17.xml><?xml version="1.0" encoding="utf-8"?>
+<file path=ppt/slides/slide18.xml><?xml version="1.0" encoding="utf-8"?>
 <p:sld xmlns:a="http://schemas.openxmlformats.org/drawingml/2006/main" xmlns:r="http://schemas.openxmlformats.org/officeDocument/2006/relationships" xmlns:p="http://schemas.openxmlformats.org/presentationml/2006/main">
   <p:cSld>
     <p:bg>
@@ -14215,7 +15357,7 @@
               <a:buNone/>
             </a:pPr>
             <a:r>
-              <a:rPr lang="en-US" b="1" i="0" u="none" strike="noStrike" cap="none">
+              <a:rPr lang="en-US" b="1" i="0" u="none" strike="noStrike" cap="none" dirty="0">
                 <a:solidFill>
                   <a:srgbClr val="7FE3D3"/>
                 </a:solidFill>
@@ -14224,7 +15366,390 @@
                 <a:cs typeface="Calibri"/>
                 <a:sym typeface="Calibri"/>
               </a:rPr>
-              <a:t>IN ONE LINE</a:t>
+              <a:t>IN </a:t>
+            </a:r>
+            <a:r>
+              <a:rPr lang="en-US" b="1" dirty="0">
+                <a:solidFill>
+                  <a:srgbClr val="7FE3D3"/>
+                </a:solidFill>
+                <a:latin typeface="Calibri"/>
+                <a:ea typeface="Calibri"/>
+                <a:cs typeface="Calibri"/>
+                <a:sym typeface="Calibri"/>
+              </a:rPr>
+              <a:t>SHORT</a:t>
+            </a:r>
+            <a:endParaRPr b="0" i="0" u="none" strike="noStrike" cap="none" dirty="0">
+              <a:solidFill>
+                <a:schemeClr val="dk1"/>
+              </a:solidFill>
+              <a:latin typeface="Calibri"/>
+              <a:ea typeface="Calibri"/>
+              <a:cs typeface="Calibri"/>
+              <a:sym typeface="Calibri"/>
+            </a:endParaRPr>
+          </a:p>
+        </p:txBody>
+      </p:sp>
+      <p:sp>
+        <p:nvSpPr>
+          <p:cNvPr id="355" name="Google Shape;355;p15"/>
+          <p:cNvSpPr/>
+          <p:nvPr/>
+        </p:nvSpPr>
+        <p:spPr>
+          <a:xfrm>
+            <a:off x="777240" y="1645920"/>
+            <a:ext cx="7772400" cy="822960"/>
+          </a:xfrm>
+          <a:prstGeom prst="rect">
+            <a:avLst/>
+          </a:prstGeom>
+          <a:noFill/>
+          <a:ln>
+            <a:noFill/>
+          </a:ln>
+        </p:spPr>
+        <p:txBody>
+          <a:bodyPr spcFirstLastPara="1" wrap="square" lIns="0" tIns="0" rIns="0" bIns="0" anchor="ctr" anchorCtr="0">
+            <a:noAutofit/>
+          </a:bodyPr>
+          <a:lstStyle/>
+          <a:p>
+            <a:pPr marL="0" marR="0" lvl="0" indent="0" algn="l" rtl="0">
+              <a:spcBef>
+                <a:spcPts val="0"/>
+              </a:spcBef>
+              <a:spcAft>
+                <a:spcPts val="0"/>
+              </a:spcAft>
+              <a:buClr>
+                <a:srgbClr val="FFFFFF"/>
+              </a:buClr>
+              <a:buSzPts val="3800"/>
+              <a:buFont typeface="Cambria"/>
+              <a:buNone/>
+            </a:pPr>
+            <a:r>
+              <a:rPr lang="en-US" sz="4000" b="1" i="0" u="none" strike="noStrike" cap="none">
+                <a:solidFill>
+                  <a:srgbClr val="FFFFFF"/>
+                </a:solidFill>
+                <a:latin typeface="Cambria"/>
+                <a:ea typeface="Cambria"/>
+                <a:cs typeface="Cambria"/>
+                <a:sym typeface="Cambria"/>
+              </a:rPr>
+              <a:t>Does &amp; Doesn't</a:t>
+            </a:r>
+            <a:endParaRPr sz="4000" b="0" i="0" u="none" strike="noStrike" cap="none">
+              <a:solidFill>
+                <a:schemeClr val="dk1"/>
+              </a:solidFill>
+              <a:latin typeface="Calibri"/>
+              <a:ea typeface="Calibri"/>
+              <a:cs typeface="Calibri"/>
+              <a:sym typeface="Calibri"/>
+            </a:endParaRPr>
+          </a:p>
+        </p:txBody>
+      </p:sp>
+      <p:sp>
+        <p:nvSpPr>
+          <p:cNvPr id="356" name="Google Shape;356;p15"/>
+          <p:cNvSpPr/>
+          <p:nvPr/>
+        </p:nvSpPr>
+        <p:spPr>
+          <a:xfrm>
+            <a:off x="822960" y="2697480"/>
+            <a:ext cx="7589520" cy="822960"/>
+          </a:xfrm>
+          <a:prstGeom prst="rect">
+            <a:avLst/>
+          </a:prstGeom>
+          <a:noFill/>
+          <a:ln>
+            <a:noFill/>
+          </a:ln>
+        </p:spPr>
+        <p:txBody>
+          <a:bodyPr spcFirstLastPara="1" wrap="square" lIns="0" tIns="0" rIns="0" bIns="0" anchor="ctr" anchorCtr="0">
+            <a:noAutofit/>
+          </a:bodyPr>
+          <a:lstStyle/>
+          <a:p>
+            <a:pPr marL="0" marR="0" lvl="0" indent="0" algn="l" rtl="0">
+              <a:lnSpc>
+                <a:spcPct val="137500"/>
+              </a:lnSpc>
+              <a:spcBef>
+                <a:spcPts val="0"/>
+              </a:spcBef>
+              <a:spcAft>
+                <a:spcPts val="0"/>
+              </a:spcAft>
+              <a:buClr>
+                <a:srgbClr val="7FE3D3"/>
+              </a:buClr>
+              <a:buSzPts val="1600"/>
+              <a:buFont typeface="Calibri"/>
+              <a:buNone/>
+            </a:pPr>
+            <a:r>
+              <a:rPr lang="en-US" sz="1800" b="1" i="0" u="none" strike="noStrike" cap="none" dirty="0">
+                <a:solidFill>
+                  <a:srgbClr val="7FE3D3"/>
+                </a:solidFill>
+                <a:latin typeface="Calibri"/>
+                <a:ea typeface="Calibri"/>
+                <a:cs typeface="Calibri"/>
+                <a:sym typeface="Calibri"/>
+              </a:rPr>
+              <a:t>DOES:  </a:t>
+            </a:r>
+            <a:r>
+              <a:rPr lang="en-US" sz="1800" b="0" i="0" u="none" strike="noStrike" cap="none" dirty="0">
+                <a:solidFill>
+                  <a:srgbClr val="DDE7E6"/>
+                </a:solidFill>
+                <a:latin typeface="Calibri"/>
+                <a:ea typeface="Calibri"/>
+                <a:cs typeface="Calibri"/>
+                <a:sym typeface="Calibri"/>
+              </a:rPr>
+              <a:t>give you ownership, rotation, auditability and a revocation kill switch for Fabric workspace data.</a:t>
+            </a:r>
+            <a:endParaRPr sz="1800" b="0" i="0" u="none" strike="noStrike" cap="none" dirty="0">
+              <a:solidFill>
+                <a:schemeClr val="dk1"/>
+              </a:solidFill>
+              <a:latin typeface="Calibri"/>
+              <a:ea typeface="Calibri"/>
+              <a:cs typeface="Calibri"/>
+              <a:sym typeface="Calibri"/>
+            </a:endParaRPr>
+          </a:p>
+        </p:txBody>
+      </p:sp>
+      <p:sp>
+        <p:nvSpPr>
+          <p:cNvPr id="357" name="Google Shape;357;p15"/>
+          <p:cNvSpPr/>
+          <p:nvPr/>
+        </p:nvSpPr>
+        <p:spPr>
+          <a:xfrm>
+            <a:off x="822960" y="3611880"/>
+            <a:ext cx="7589520" cy="822960"/>
+          </a:xfrm>
+          <a:prstGeom prst="rect">
+            <a:avLst/>
+          </a:prstGeom>
+          <a:noFill/>
+          <a:ln>
+            <a:noFill/>
+          </a:ln>
+        </p:spPr>
+        <p:txBody>
+          <a:bodyPr spcFirstLastPara="1" wrap="square" lIns="0" tIns="0" rIns="0" bIns="0" anchor="ctr" anchorCtr="0">
+            <a:noAutofit/>
+          </a:bodyPr>
+          <a:lstStyle/>
+          <a:p>
+            <a:pPr marL="0" marR="0" lvl="0" indent="0" algn="l" rtl="0">
+              <a:lnSpc>
+                <a:spcPct val="137500"/>
+              </a:lnSpc>
+              <a:spcBef>
+                <a:spcPts val="0"/>
+              </a:spcBef>
+              <a:spcAft>
+                <a:spcPts val="0"/>
+              </a:spcAft>
+              <a:buClr>
+                <a:srgbClr val="E0A33E"/>
+              </a:buClr>
+              <a:buSzPts val="1600"/>
+              <a:buFont typeface="Calibri"/>
+              <a:buNone/>
+            </a:pPr>
+            <a:r>
+              <a:rPr lang="en-US" sz="1800" b="1" i="0" u="none" strike="noStrike" cap="none">
+                <a:solidFill>
+                  <a:srgbClr val="E0A33E"/>
+                </a:solidFill>
+                <a:latin typeface="Calibri"/>
+                <a:ea typeface="Calibri"/>
+                <a:cs typeface="Calibri"/>
+                <a:sym typeface="Calibri"/>
+              </a:rPr>
+              <a:t>DOESN'T:  </a:t>
+            </a:r>
+            <a:r>
+              <a:rPr lang="en-US" sz="1800" b="0" i="0" u="none" strike="noStrike" cap="none">
+                <a:solidFill>
+                  <a:srgbClr val="DDE7E6"/>
+                </a:solidFill>
+                <a:latin typeface="Calibri"/>
+                <a:ea typeface="Calibri"/>
+                <a:cs typeface="Calibri"/>
+                <a:sym typeface="Calibri"/>
+              </a:rPr>
+              <a:t>cover semantic models, protect every byte, remove Microsoft from the chain, or run on a trial.</a:t>
+            </a:r>
+            <a:endParaRPr sz="1800" b="0" i="0" u="none" strike="noStrike" cap="none">
+              <a:solidFill>
+                <a:schemeClr val="dk1"/>
+              </a:solidFill>
+              <a:latin typeface="Calibri"/>
+              <a:ea typeface="Calibri"/>
+              <a:cs typeface="Calibri"/>
+              <a:sym typeface="Calibri"/>
+            </a:endParaRPr>
+          </a:p>
+        </p:txBody>
+      </p:sp>
+      <p:cxnSp>
+        <p:nvCxnSpPr>
+          <p:cNvPr id="358" name="Google Shape;358;p15"/>
+          <p:cNvCxnSpPr/>
+          <p:nvPr/>
+        </p:nvCxnSpPr>
+        <p:spPr>
+          <a:xfrm>
+            <a:off x="841248" y="4663440"/>
+            <a:ext cx="7498080" cy="0"/>
+          </a:xfrm>
+          <a:prstGeom prst="straightConnector1">
+            <a:avLst/>
+          </a:prstGeom>
+          <a:noFill/>
+          <a:ln w="12700" cap="flat" cmpd="sng">
+            <a:solidFill>
+              <a:srgbClr val="31525B"/>
+            </a:solidFill>
+            <a:prstDash val="solid"/>
+            <a:round/>
+            <a:headEnd type="none" w="sm" len="sm"/>
+            <a:tailEnd type="none" w="sm" len="sm"/>
+          </a:ln>
+        </p:spPr>
+      </p:cxnSp>
+      <p:sp>
+        <p:nvSpPr>
+          <p:cNvPr id="359" name="Google Shape;359;p15"/>
+          <p:cNvSpPr/>
+          <p:nvPr/>
+        </p:nvSpPr>
+        <p:spPr>
+          <a:xfrm>
+            <a:off x="822960" y="4892040"/>
+            <a:ext cx="7315200" cy="548640"/>
+          </a:xfrm>
+          <a:prstGeom prst="rect">
+            <a:avLst/>
+          </a:prstGeom>
+          <a:noFill/>
+          <a:ln>
+            <a:noFill/>
+          </a:ln>
+        </p:spPr>
+        <p:txBody>
+          <a:bodyPr spcFirstLastPara="1" wrap="square" lIns="0" tIns="0" rIns="0" bIns="0" anchor="ctr" anchorCtr="0">
+            <a:noAutofit/>
+          </a:bodyPr>
+          <a:lstStyle/>
+          <a:p>
+            <a:pPr marL="0" marR="0" lvl="0" indent="0" algn="l" rtl="0">
+              <a:spcBef>
+                <a:spcPts val="0"/>
+              </a:spcBef>
+              <a:spcAft>
+                <a:spcPts val="0"/>
+              </a:spcAft>
+              <a:buClr>
+                <a:srgbClr val="FFFFFF"/>
+              </a:buClr>
+              <a:buSzPts val="2400"/>
+              <a:buFont typeface="Cambria"/>
+              <a:buNone/>
+            </a:pPr>
+            <a:r>
+              <a:rPr lang="en-US" sz="2800" b="1" i="0" u="none" strike="noStrike" cap="none" dirty="0">
+                <a:solidFill>
+                  <a:srgbClr val="FFFFFF"/>
+                </a:solidFill>
+                <a:latin typeface="Cambria"/>
+                <a:ea typeface="Cambria"/>
+                <a:cs typeface="Cambria"/>
+                <a:sym typeface="Cambria"/>
+              </a:rPr>
+              <a:t>Thank you</a:t>
+            </a:r>
+            <a:endParaRPr sz="2800" b="0" i="0" u="none" strike="noStrike" cap="none" dirty="0">
+              <a:solidFill>
+                <a:schemeClr val="dk1"/>
+              </a:solidFill>
+              <a:latin typeface="Calibri"/>
+              <a:ea typeface="Calibri"/>
+              <a:cs typeface="Calibri"/>
+              <a:sym typeface="Calibri"/>
+            </a:endParaRPr>
+          </a:p>
+        </p:txBody>
+      </p:sp>
+      <p:sp>
+        <p:nvSpPr>
+          <p:cNvPr id="360" name="Google Shape;360;p15"/>
+          <p:cNvSpPr/>
+          <p:nvPr/>
+        </p:nvSpPr>
+        <p:spPr>
+          <a:xfrm>
+            <a:off x="822960" y="5532120"/>
+            <a:ext cx="7772400" cy="365760"/>
+          </a:xfrm>
+          <a:prstGeom prst="rect">
+            <a:avLst/>
+          </a:prstGeom>
+          <a:noFill/>
+          <a:ln>
+            <a:noFill/>
+          </a:ln>
+        </p:spPr>
+        <p:txBody>
+          <a:bodyPr spcFirstLastPara="1" wrap="square" lIns="0" tIns="0" rIns="0" bIns="0" anchor="ctr" anchorCtr="0">
+            <a:noAutofit/>
+          </a:bodyPr>
+          <a:lstStyle/>
+          <a:p>
+            <a:pPr marL="0" marR="0" lvl="0" indent="0" algn="l" rtl="0">
+              <a:spcBef>
+                <a:spcPts val="0"/>
+              </a:spcBef>
+              <a:spcAft>
+                <a:spcPts val="0"/>
+              </a:spcAft>
+              <a:buClr>
+                <a:srgbClr val="3AAFA9"/>
+              </a:buClr>
+              <a:buSzPts val="1200"/>
+              <a:buFont typeface="Calibri"/>
+              <a:buNone/>
+            </a:pPr>
+            <a:r>
+              <a:rPr lang="en-US" b="0" i="0" u="none" strike="noStrike" cap="none">
+                <a:solidFill>
+                  <a:srgbClr val="3AAFA9"/>
+                </a:solidFill>
+                <a:latin typeface="Calibri"/>
+                <a:ea typeface="Calibri"/>
+                <a:cs typeface="Calibri"/>
+                <a:sym typeface="Calibri"/>
+              </a:rPr>
+              <a:t>Docs: learn.microsoft.com/fabric/security/workspace-customer-managed-keys</a:t>
             </a:r>
             <a:endParaRPr b="0" i="0" u="none" strike="noStrike" cap="none">
               <a:solidFill>
@@ -14240,14 +15765,14 @@
       </p:sp>
       <p:sp>
         <p:nvSpPr>
-          <p:cNvPr id="355" name="Google Shape;355;p15"/>
-          <p:cNvSpPr/>
-          <p:nvPr/>
-        </p:nvSpPr>
-        <p:spPr>
-          <a:xfrm>
-            <a:off x="777240" y="1645920"/>
-            <a:ext cx="7772400" cy="822960"/>
+          <p:cNvPr id="361" name="Google Shape;361;p15"/>
+          <p:cNvSpPr/>
+          <p:nvPr/>
+        </p:nvSpPr>
+        <p:spPr>
+          <a:xfrm>
+            <a:off x="822960" y="6073596"/>
+            <a:ext cx="7772400" cy="430887"/>
           </a:xfrm>
           <a:prstGeom prst="rect">
             <a:avLst/>
@@ -14259,378 +15784,7 @@
         </p:spPr>
         <p:txBody>
           <a:bodyPr spcFirstLastPara="1" wrap="square" lIns="0" tIns="0" rIns="0" bIns="0" anchor="ctr" anchorCtr="0">
-            <a:noAutofit/>
-          </a:bodyPr>
-          <a:lstStyle/>
-          <a:p>
-            <a:pPr marL="0" marR="0" lvl="0" indent="0" algn="l" rtl="0">
-              <a:spcBef>
-                <a:spcPts val="0"/>
-              </a:spcBef>
-              <a:spcAft>
-                <a:spcPts val="0"/>
-              </a:spcAft>
-              <a:buClr>
-                <a:srgbClr val="FFFFFF"/>
-              </a:buClr>
-              <a:buSzPts val="3800"/>
-              <a:buFont typeface="Cambria"/>
-              <a:buNone/>
-            </a:pPr>
-            <a:r>
-              <a:rPr lang="en-US" sz="4000" b="1" i="0" u="none" strike="noStrike" cap="none">
-                <a:solidFill>
-                  <a:srgbClr val="FFFFFF"/>
-                </a:solidFill>
-                <a:latin typeface="Cambria"/>
-                <a:ea typeface="Cambria"/>
-                <a:cs typeface="Cambria"/>
-                <a:sym typeface="Cambria"/>
-              </a:rPr>
-              <a:t>Does &amp; Doesn't</a:t>
-            </a:r>
-            <a:endParaRPr sz="4000" b="0" i="0" u="none" strike="noStrike" cap="none">
-              <a:solidFill>
-                <a:schemeClr val="dk1"/>
-              </a:solidFill>
-              <a:latin typeface="Calibri"/>
-              <a:ea typeface="Calibri"/>
-              <a:cs typeface="Calibri"/>
-              <a:sym typeface="Calibri"/>
-            </a:endParaRPr>
-          </a:p>
-        </p:txBody>
-      </p:sp>
-      <p:sp>
-        <p:nvSpPr>
-          <p:cNvPr id="356" name="Google Shape;356;p15"/>
-          <p:cNvSpPr/>
-          <p:nvPr/>
-        </p:nvSpPr>
-        <p:spPr>
-          <a:xfrm>
-            <a:off x="822960" y="2697480"/>
-            <a:ext cx="7589520" cy="822960"/>
-          </a:xfrm>
-          <a:prstGeom prst="rect">
-            <a:avLst/>
-          </a:prstGeom>
-          <a:noFill/>
-          <a:ln>
-            <a:noFill/>
-          </a:ln>
-        </p:spPr>
-        <p:txBody>
-          <a:bodyPr spcFirstLastPara="1" wrap="square" lIns="0" tIns="0" rIns="0" bIns="0" anchor="ctr" anchorCtr="0">
-            <a:noAutofit/>
-          </a:bodyPr>
-          <a:lstStyle/>
-          <a:p>
-            <a:pPr marL="0" marR="0" lvl="0" indent="0" algn="l" rtl="0">
-              <a:lnSpc>
-                <a:spcPct val="137500"/>
-              </a:lnSpc>
-              <a:spcBef>
-                <a:spcPts val="0"/>
-              </a:spcBef>
-              <a:spcAft>
-                <a:spcPts val="0"/>
-              </a:spcAft>
-              <a:buClr>
-                <a:srgbClr val="7FE3D3"/>
-              </a:buClr>
-              <a:buSzPts val="1600"/>
-              <a:buFont typeface="Calibri"/>
-              <a:buNone/>
-            </a:pPr>
-            <a:r>
-              <a:rPr lang="en-US" sz="1800" b="1" i="0" u="none" strike="noStrike" cap="none">
-                <a:solidFill>
-                  <a:srgbClr val="7FE3D3"/>
-                </a:solidFill>
-                <a:latin typeface="Calibri"/>
-                <a:ea typeface="Calibri"/>
-                <a:cs typeface="Calibri"/>
-                <a:sym typeface="Calibri"/>
-              </a:rPr>
-              <a:t>DOES:  </a:t>
-            </a:r>
-            <a:r>
-              <a:rPr lang="en-US" sz="1800" b="0" i="0" u="none" strike="noStrike" cap="none">
-                <a:solidFill>
-                  <a:srgbClr val="DDE7E6"/>
-                </a:solidFill>
-                <a:latin typeface="Calibri"/>
-                <a:ea typeface="Calibri"/>
-                <a:cs typeface="Calibri"/>
-                <a:sym typeface="Calibri"/>
-              </a:rPr>
-              <a:t>give you ownership, rotation, auditability and a revocation kill switch for Fabric workspace data.</a:t>
-            </a:r>
-            <a:endParaRPr sz="1800" b="0" i="0" u="none" strike="noStrike" cap="none">
-              <a:solidFill>
-                <a:schemeClr val="dk1"/>
-              </a:solidFill>
-              <a:latin typeface="Calibri"/>
-              <a:ea typeface="Calibri"/>
-              <a:cs typeface="Calibri"/>
-              <a:sym typeface="Calibri"/>
-            </a:endParaRPr>
-          </a:p>
-        </p:txBody>
-      </p:sp>
-      <p:sp>
-        <p:nvSpPr>
-          <p:cNvPr id="357" name="Google Shape;357;p15"/>
-          <p:cNvSpPr/>
-          <p:nvPr/>
-        </p:nvSpPr>
-        <p:spPr>
-          <a:xfrm>
-            <a:off x="822960" y="3611880"/>
-            <a:ext cx="7589520" cy="822960"/>
-          </a:xfrm>
-          <a:prstGeom prst="rect">
-            <a:avLst/>
-          </a:prstGeom>
-          <a:noFill/>
-          <a:ln>
-            <a:noFill/>
-          </a:ln>
-        </p:spPr>
-        <p:txBody>
-          <a:bodyPr spcFirstLastPara="1" wrap="square" lIns="0" tIns="0" rIns="0" bIns="0" anchor="ctr" anchorCtr="0">
-            <a:noAutofit/>
-          </a:bodyPr>
-          <a:lstStyle/>
-          <a:p>
-            <a:pPr marL="0" marR="0" lvl="0" indent="0" algn="l" rtl="0">
-              <a:lnSpc>
-                <a:spcPct val="137500"/>
-              </a:lnSpc>
-              <a:spcBef>
-                <a:spcPts val="0"/>
-              </a:spcBef>
-              <a:spcAft>
-                <a:spcPts val="0"/>
-              </a:spcAft>
-              <a:buClr>
-                <a:srgbClr val="E0A33E"/>
-              </a:buClr>
-              <a:buSzPts val="1600"/>
-              <a:buFont typeface="Calibri"/>
-              <a:buNone/>
-            </a:pPr>
-            <a:r>
-              <a:rPr lang="en-US" sz="1800" b="1" i="0" u="none" strike="noStrike" cap="none">
-                <a:solidFill>
-                  <a:srgbClr val="E0A33E"/>
-                </a:solidFill>
-                <a:latin typeface="Calibri"/>
-                <a:ea typeface="Calibri"/>
-                <a:cs typeface="Calibri"/>
-                <a:sym typeface="Calibri"/>
-              </a:rPr>
-              <a:t>DOESN'T:  </a:t>
-            </a:r>
-            <a:r>
-              <a:rPr lang="en-US" sz="1800" b="0" i="0" u="none" strike="noStrike" cap="none">
-                <a:solidFill>
-                  <a:srgbClr val="DDE7E6"/>
-                </a:solidFill>
-                <a:latin typeface="Calibri"/>
-                <a:ea typeface="Calibri"/>
-                <a:cs typeface="Calibri"/>
-                <a:sym typeface="Calibri"/>
-              </a:rPr>
-              <a:t>cover semantic models, protect every byte, remove Microsoft from the chain, or run on a trial.</a:t>
-            </a:r>
-            <a:endParaRPr sz="1800" b="0" i="0" u="none" strike="noStrike" cap="none">
-              <a:solidFill>
-                <a:schemeClr val="dk1"/>
-              </a:solidFill>
-              <a:latin typeface="Calibri"/>
-              <a:ea typeface="Calibri"/>
-              <a:cs typeface="Calibri"/>
-              <a:sym typeface="Calibri"/>
-            </a:endParaRPr>
-          </a:p>
-        </p:txBody>
-      </p:sp>
-      <p:cxnSp>
-        <p:nvCxnSpPr>
-          <p:cNvPr id="358" name="Google Shape;358;p15"/>
-          <p:cNvCxnSpPr/>
-          <p:nvPr/>
-        </p:nvCxnSpPr>
-        <p:spPr>
-          <a:xfrm>
-            <a:off x="841248" y="4663440"/>
-            <a:ext cx="7498080" cy="0"/>
-          </a:xfrm>
-          <a:prstGeom prst="straightConnector1">
-            <a:avLst/>
-          </a:prstGeom>
-          <a:noFill/>
-          <a:ln w="12700" cap="flat" cmpd="sng">
-            <a:solidFill>
-              <a:srgbClr val="31525B"/>
-            </a:solidFill>
-            <a:prstDash val="solid"/>
-            <a:round/>
-            <a:headEnd type="none" w="sm" len="sm"/>
-            <a:tailEnd type="none" w="sm" len="sm"/>
-          </a:ln>
-        </p:spPr>
-      </p:cxnSp>
-      <p:sp>
-        <p:nvSpPr>
-          <p:cNvPr id="359" name="Google Shape;359;p15"/>
-          <p:cNvSpPr/>
-          <p:nvPr/>
-        </p:nvSpPr>
-        <p:spPr>
-          <a:xfrm>
-            <a:off x="822960" y="4892040"/>
-            <a:ext cx="7315200" cy="548640"/>
-          </a:xfrm>
-          <a:prstGeom prst="rect">
-            <a:avLst/>
-          </a:prstGeom>
-          <a:noFill/>
-          <a:ln>
-            <a:noFill/>
-          </a:ln>
-        </p:spPr>
-        <p:txBody>
-          <a:bodyPr spcFirstLastPara="1" wrap="square" lIns="0" tIns="0" rIns="0" bIns="0" anchor="ctr" anchorCtr="0">
-            <a:noAutofit/>
-          </a:bodyPr>
-          <a:lstStyle/>
-          <a:p>
-            <a:pPr marL="0" marR="0" lvl="0" indent="0" algn="l" rtl="0">
-              <a:spcBef>
-                <a:spcPts val="0"/>
-              </a:spcBef>
-              <a:spcAft>
-                <a:spcPts val="0"/>
-              </a:spcAft>
-              <a:buClr>
-                <a:srgbClr val="FFFFFF"/>
-              </a:buClr>
-              <a:buSzPts val="2400"/>
-              <a:buFont typeface="Cambria"/>
-              <a:buNone/>
-            </a:pPr>
-            <a:r>
-              <a:rPr lang="en-US" sz="2800" b="1" i="0" u="none" strike="noStrike" cap="none" dirty="0">
-                <a:solidFill>
-                  <a:srgbClr val="FFFFFF"/>
-                </a:solidFill>
-                <a:latin typeface="Cambria"/>
-                <a:ea typeface="Cambria"/>
-                <a:cs typeface="Cambria"/>
-                <a:sym typeface="Cambria"/>
-              </a:rPr>
-              <a:t>Thank you</a:t>
-            </a:r>
-            <a:endParaRPr sz="2800" b="0" i="0" u="none" strike="noStrike" cap="none" dirty="0">
-              <a:solidFill>
-                <a:schemeClr val="dk1"/>
-              </a:solidFill>
-              <a:latin typeface="Calibri"/>
-              <a:ea typeface="Calibri"/>
-              <a:cs typeface="Calibri"/>
-              <a:sym typeface="Calibri"/>
-            </a:endParaRPr>
-          </a:p>
-        </p:txBody>
-      </p:sp>
-      <p:sp>
-        <p:nvSpPr>
-          <p:cNvPr id="360" name="Google Shape;360;p15"/>
-          <p:cNvSpPr/>
-          <p:nvPr/>
-        </p:nvSpPr>
-        <p:spPr>
-          <a:xfrm>
-            <a:off x="822960" y="5532120"/>
-            <a:ext cx="7772400" cy="365760"/>
-          </a:xfrm>
-          <a:prstGeom prst="rect">
-            <a:avLst/>
-          </a:prstGeom>
-          <a:noFill/>
-          <a:ln>
-            <a:noFill/>
-          </a:ln>
-        </p:spPr>
-        <p:txBody>
-          <a:bodyPr spcFirstLastPara="1" wrap="square" lIns="0" tIns="0" rIns="0" bIns="0" anchor="ctr" anchorCtr="0">
-            <a:noAutofit/>
-          </a:bodyPr>
-          <a:lstStyle/>
-          <a:p>
-            <a:pPr marL="0" marR="0" lvl="0" indent="0" algn="l" rtl="0">
-              <a:spcBef>
-                <a:spcPts val="0"/>
-              </a:spcBef>
-              <a:spcAft>
-                <a:spcPts val="0"/>
-              </a:spcAft>
-              <a:buClr>
-                <a:srgbClr val="3AAFA9"/>
-              </a:buClr>
-              <a:buSzPts val="1200"/>
-              <a:buFont typeface="Calibri"/>
-              <a:buNone/>
-            </a:pPr>
-            <a:r>
-              <a:rPr lang="en-US" b="0" i="0" u="none" strike="noStrike" cap="none">
-                <a:solidFill>
-                  <a:srgbClr val="3AAFA9"/>
-                </a:solidFill>
-                <a:latin typeface="Calibri"/>
-                <a:ea typeface="Calibri"/>
-                <a:cs typeface="Calibri"/>
-                <a:sym typeface="Calibri"/>
-              </a:rPr>
-              <a:t>Docs: learn.microsoft.com/fabric/security/workspace-customer-managed-keys</a:t>
-            </a:r>
-            <a:endParaRPr b="0" i="0" u="none" strike="noStrike" cap="none">
-              <a:solidFill>
-                <a:schemeClr val="dk1"/>
-              </a:solidFill>
-              <a:latin typeface="Calibri"/>
-              <a:ea typeface="Calibri"/>
-              <a:cs typeface="Calibri"/>
-              <a:sym typeface="Calibri"/>
-            </a:endParaRPr>
-          </a:p>
-        </p:txBody>
-      </p:sp>
-      <p:sp>
-        <p:nvSpPr>
-          <p:cNvPr id="361" name="Google Shape;361;p15"/>
-          <p:cNvSpPr/>
-          <p:nvPr/>
-        </p:nvSpPr>
-        <p:spPr>
-          <a:xfrm>
-            <a:off x="822960" y="6060440"/>
-            <a:ext cx="9418320" cy="457200"/>
-          </a:xfrm>
-          <a:prstGeom prst="rect">
-            <a:avLst/>
-          </a:prstGeom>
-          <a:noFill/>
-          <a:ln>
-            <a:noFill/>
-          </a:ln>
-        </p:spPr>
-        <p:txBody>
-          <a:bodyPr spcFirstLastPara="1" wrap="square" lIns="0" tIns="0" rIns="0" bIns="0" anchor="ctr" anchorCtr="0">
-            <a:noAutofit/>
+            <a:spAutoFit/>
           </a:bodyPr>
           <a:lstStyle/>
           <a:p>
@@ -14680,7 +15834,7 @@
 </p:sld>
 </file>
 
-<file path=ppt/slides/slide18.xml><?xml version="1.0" encoding="utf-8"?>
+<file path=ppt/slides/slide19.xml><?xml version="1.0" encoding="utf-8"?>
 <p:sld xmlns:a="http://schemas.openxmlformats.org/drawingml/2006/main" xmlns:r="http://schemas.openxmlformats.org/officeDocument/2006/relationships" xmlns:p="http://schemas.openxmlformats.org/presentationml/2006/main">
   <p:cSld>
     <p:bg>
@@ -15362,7 +16516,19 @@
                 <a:cs typeface="Calibri"/>
                 <a:sym typeface="Calibri"/>
               </a:rPr>
-              <a:t>github</a:t>
+              <a:t>my</a:t>
+            </a:r>
+            <a:r>
+              <a:rPr lang="nl-NL" sz="1600" b="1" dirty="0">
+                <a:solidFill>
+                  <a:schemeClr val="dk1"/>
+                </a:solidFill>
+                <a:latin typeface="Calibri"/>
+                <a:ea typeface="Calibri"/>
+                <a:cs typeface="Calibri"/>
+                <a:sym typeface="Calibri"/>
+              </a:rPr>
+              <a:t> GitHub</a:t>
             </a:r>
             <a:endParaRPr sz="1600" b="1" i="0" u="none" strike="noStrike" cap="none" dirty="0">
               <a:solidFill>
@@ -15378,59 +16544,54 @@
       </p:sp>
       <p:sp>
         <p:nvSpPr>
-          <p:cNvPr id="700" name="QR Placeholder"/>
-          <p:cNvSpPr/>
-          <p:nvPr/>
-        </p:nvSpPr>
-        <p:spPr>
-          <a:xfrm>
-            <a:off x="7573022" y="2850000"/>
-            <a:ext cx="2700000" cy="2700000"/>
-          </a:xfrm>
-          <a:prstGeom prst="rect">
-            <a:avLst/>
-          </a:prstGeom>
-          <a:solidFill>
-            <a:srgbClr val="FFFFFF"/>
-          </a:solidFill>
-          <a:ln w="19050" cap="flat" cmpd="sng">
-            <a:solidFill>
-              <a:srgbClr val="B9C4C3"/>
-            </a:solidFill>
-            <a:prstDash val="dash"/>
-          </a:ln>
-        </p:spPr>
-        <p:txBody>
-          <a:bodyPr wrap="square" lIns="45720" tIns="45720" rIns="45720" bIns="45720" anchor="ctr" anchorCtr="1">
+          <p:cNvPr id="701" name="FeedbackCaption"/>
+          <p:cNvSpPr txBox="1"/>
+          <p:nvPr/>
+        </p:nvSpPr>
+        <p:spPr>
+          <a:xfrm>
+            <a:off x="914400" y="5670000"/>
+            <a:ext cx="4709160" cy="500000"/>
+          </a:xfrm>
+          <a:prstGeom prst="rect">
+            <a:avLst/>
+          </a:prstGeom>
+          <a:noFill/>
+          <a:ln>
+            <a:noFill/>
+          </a:ln>
+        </p:spPr>
+        <p:txBody>
+          <a:bodyPr wrap="square" lIns="0" tIns="0" rIns="0" bIns="0" anchor="ctr">
             <a:noAutofit/>
           </a:bodyPr>
           <a:lstStyle/>
           <a:p>
             <a:pPr algn="ctr"/>
             <a:r>
-              <a:rPr lang="en-US" sz="1150" b="0" i="1" dirty="0">
-                <a:solidFill>
-                  <a:srgbClr val="9AA6A5"/>
+              <a:rPr lang="en-US" sz="1100" b="0" i="1">
+                <a:solidFill>
+                  <a:srgbClr val="5B6B72"/>
                 </a:solidFill>
                 <a:latin typeface="Calibri"/>
                 <a:ea typeface="Calibri"/>
                 <a:cs typeface="Calibri"/>
                 <a:sym typeface="Calibri"/>
               </a:rPr>
-              <a:t> QR code here</a:t>
-            </a:r>
-          </a:p>
-        </p:txBody>
-      </p:sp>
-      <p:sp>
-        <p:nvSpPr>
-          <p:cNvPr id="701" name="FeedbackCaption"/>
+              <a:t>Scan to tell me what worked (and what didn't).</a:t>
+            </a:r>
+          </a:p>
+        </p:txBody>
+      </p:sp>
+      <p:sp>
+        <p:nvSpPr>
+          <p:cNvPr id="702" name="GithubCaption"/>
           <p:cNvSpPr txBox="1"/>
           <p:nvPr/>
         </p:nvSpPr>
         <p:spPr>
           <a:xfrm>
-            <a:off x="914400" y="5670000"/>
+            <a:off x="6568442" y="5670000"/>
             <a:ext cx="4709160" cy="500000"/>
           </a:xfrm>
           <a:prstGeom prst="rect">
@@ -15458,52 +16619,93 @@
                 <a:cs typeface="Calibri"/>
                 <a:sym typeface="Calibri"/>
               </a:rPr>
-              <a:t>Scan to tell me what worked (and what didn't).</a:t>
-            </a:r>
-          </a:p>
-        </p:txBody>
-      </p:sp>
-      <p:sp>
-        <p:nvSpPr>
-          <p:cNvPr id="702" name="GithubCaption"/>
-          <p:cNvSpPr txBox="1"/>
-          <p:nvPr/>
-        </p:nvSpPr>
-        <p:spPr>
-          <a:xfrm>
-            <a:off x="6568442" y="5670000"/>
-            <a:ext cx="4709160" cy="500000"/>
-          </a:xfrm>
-          <a:prstGeom prst="rect">
-            <a:avLst/>
-          </a:prstGeom>
-          <a:noFill/>
-          <a:ln>
-            <a:noFill/>
-          </a:ln>
-        </p:spPr>
-        <p:txBody>
-          <a:bodyPr wrap="square" lIns="0" tIns="0" rIns="0" bIns="0" anchor="ctr">
-            <a:noAutofit/>
-          </a:bodyPr>
+              <a:t>Scan for the demo notebook, setup guide, and scripts.</a:t>
+            </a:r>
+          </a:p>
+        </p:txBody>
+      </p:sp>
+      <p:sp>
+        <p:nvSpPr>
+          <p:cNvPr id="9" name="Rectangle 8">
+            <a:extLst>
+              <a:ext uri="{FF2B5EF4-FFF2-40B4-BE49-F238E27FC236}">
+                <a16:creationId xmlns:a16="http://schemas.microsoft.com/office/drawing/2014/main" id="{8B7FBBBD-DD60-2120-CF03-21E836167798}"/>
+              </a:ext>
+            </a:extLst>
+          </p:cNvPr>
+          <p:cNvSpPr/>
+          <p:nvPr/>
+        </p:nvSpPr>
+        <p:spPr>
+          <a:xfrm>
+            <a:off x="7573022" y="2850000"/>
+            <a:ext cx="2700000" cy="2700000"/>
+          </a:xfrm>
+          <a:prstGeom prst="rect">
+            <a:avLst/>
+          </a:prstGeom>
+          <a:solidFill>
+            <a:schemeClr val="bg1"/>
+          </a:solidFill>
+          <a:ln>
+            <a:noFill/>
+          </a:ln>
+        </p:spPr>
+        <p:style>
+          <a:lnRef idx="2">
+            <a:schemeClr val="accent1">
+              <a:shade val="15000"/>
+            </a:schemeClr>
+          </a:lnRef>
+          <a:fillRef idx="1">
+            <a:schemeClr val="accent1"/>
+          </a:fillRef>
+          <a:effectRef idx="0">
+            <a:schemeClr val="accent1"/>
+          </a:effectRef>
+          <a:fontRef idx="minor">
+            <a:schemeClr val="lt1"/>
+          </a:fontRef>
+        </p:style>
+        <p:txBody>
+          <a:bodyPr rtlCol="0" anchor="ctr"/>
           <a:lstStyle/>
           <a:p>
             <a:pPr algn="ctr"/>
-            <a:r>
-              <a:rPr lang="en-US" sz="1100" b="0" i="1">
-                <a:solidFill>
-                  <a:srgbClr val="5B6B72"/>
-                </a:solidFill>
-                <a:latin typeface="Calibri"/>
-                <a:ea typeface="Calibri"/>
-                <a:cs typeface="Calibri"/>
-                <a:sym typeface="Calibri"/>
-              </a:rPr>
-              <a:t>Scan for the demo notebook, setup guide, and scripts.</a:t>
-            </a:r>
-          </a:p>
-        </p:txBody>
-      </p:sp>
+            <a:endParaRPr lang="en-US"/>
+          </a:p>
+        </p:txBody>
+      </p:sp>
+      <p:pic>
+        <p:nvPicPr>
+          <p:cNvPr id="7" name="Picture 6">
+            <a:extLst>
+              <a:ext uri="{FF2B5EF4-FFF2-40B4-BE49-F238E27FC236}">
+                <a16:creationId xmlns:a16="http://schemas.microsoft.com/office/drawing/2014/main" id="{36CA030E-B07D-C71F-4318-E4861240BA13}"/>
+              </a:ext>
+            </a:extLst>
+          </p:cNvPr>
+          <p:cNvPicPr>
+            <a:picLocks noChangeAspect="1"/>
+          </p:cNvPicPr>
+          <p:nvPr/>
+        </p:nvPicPr>
+        <p:blipFill>
+          <a:blip r:embed="rId5"/>
+          <a:stretch>
+            <a:fillRect/>
+          </a:stretch>
+        </p:blipFill>
+        <p:spPr>
+          <a:xfrm>
+            <a:off x="7784337" y="3066008"/>
+            <a:ext cx="2277370" cy="2231363"/>
+          </a:xfrm>
+          <a:prstGeom prst="rect">
+            <a:avLst/>
+          </a:prstGeom>
+        </p:spPr>
+      </p:pic>
     </p:spTree>
     <p:extLst>
       <p:ext uri="{BB962C8B-B14F-4D97-AF65-F5344CB8AC3E}">
@@ -15518,6 +16720,66 @@
 </file>
 
 <file path=ppt/slides/slide2.xml><?xml version="1.0" encoding="utf-8"?>
+<p:sld xmlns:a="http://schemas.openxmlformats.org/drawingml/2006/main" xmlns:r="http://schemas.openxmlformats.org/officeDocument/2006/relationships" xmlns:p="http://schemas.openxmlformats.org/presentationml/2006/main">
+  <p:cSld>
+    <p:spTree>
+      <p:nvGrpSpPr>
+        <p:cNvPr id="1" name=""/>
+        <p:cNvGrpSpPr/>
+        <p:nvPr/>
+      </p:nvGrpSpPr>
+      <p:grpSpPr>
+        <a:xfrm>
+          <a:off x="0" y="0"/>
+          <a:ext cx="0" cy="0"/>
+          <a:chOff x="0" y="0"/>
+          <a:chExt cx="0" cy="0"/>
+        </a:xfrm>
+      </p:grpSpPr>
+      <p:pic>
+        <p:nvPicPr>
+          <p:cNvPr id="2" name="Picture 1">
+            <a:extLst>
+              <a:ext uri="{FF2B5EF4-FFF2-40B4-BE49-F238E27FC236}">
+                <a16:creationId xmlns:a16="http://schemas.microsoft.com/office/drawing/2014/main" id="{79C3B457-7C8F-7C65-CC6C-838460FB897F}"/>
+              </a:ext>
+            </a:extLst>
+          </p:cNvPr>
+          <p:cNvPicPr>
+            <a:picLocks noChangeAspect="1"/>
+          </p:cNvPicPr>
+          <p:nvPr/>
+        </p:nvPicPr>
+        <p:blipFill>
+          <a:blip r:embed="rId2"/>
+          <a:stretch>
+            <a:fillRect/>
+          </a:stretch>
+        </p:blipFill>
+        <p:spPr>
+          <a:xfrm>
+            <a:off x="0" y="-1"/>
+            <a:ext cx="12192000" cy="6858001"/>
+          </a:xfrm>
+          <a:prstGeom prst="rect">
+            <a:avLst/>
+          </a:prstGeom>
+        </p:spPr>
+      </p:pic>
+    </p:spTree>
+    <p:extLst>
+      <p:ext uri="{BB962C8B-B14F-4D97-AF65-F5344CB8AC3E}">
+        <p14:creationId xmlns:p14="http://schemas.microsoft.com/office/powerpoint/2010/main" val="1480689874"/>
+      </p:ext>
+    </p:extLst>
+  </p:cSld>
+  <p:clrMapOvr>
+    <a:masterClrMapping/>
+  </p:clrMapOvr>
+</p:sld>
+</file>
+
+<file path=ppt/slides/slide3.xml><?xml version="1.0" encoding="utf-8"?>
 <p:sld xmlns:a="http://schemas.openxmlformats.org/drawingml/2006/main" xmlns:r="http://schemas.openxmlformats.org/officeDocument/2006/relationships" xmlns:p="http://schemas.openxmlformats.org/presentationml/2006/main">
   <p:cSld>
     <p:bg>
@@ -16753,7 +18015,7 @@
         </p:nvSpPr>
         <p:spPr>
           <a:xfrm>
-            <a:off x="11904319" y="3118104"/>
+            <a:off x="11531600" y="3118104"/>
             <a:ext cx="365760" cy="274320"/>
           </a:xfrm>
           <a:prstGeom prst="rect">
@@ -16816,7 +18078,7 @@
 </p:sld>
 </file>
 
-<file path=ppt/slides/slide3.xml><?xml version="1.0" encoding="utf-8"?>
+<file path=ppt/slides/slide4.xml><?xml version="1.0" encoding="utf-8"?>
 <p:sld xmlns:a="http://schemas.openxmlformats.org/drawingml/2006/main" xmlns:r="http://schemas.openxmlformats.org/officeDocument/2006/relationships" xmlns:p="http://schemas.openxmlformats.org/presentationml/2006/main">
   <p:cSld>
     <p:bg>
@@ -18965,44 +20227,6 @@
           </a:p>
         </p:txBody>
       </p:sp>
-      <p:sp>
-        <p:nvSpPr>
-          <p:cNvPr id="70" name="Google Shape;70;p4"/>
-          <p:cNvSpPr txBox="1"/>
-          <p:nvPr/>
-        </p:nvSpPr>
-        <p:spPr>
-          <a:xfrm>
-            <a:off x="4355825" y="6497200"/>
-            <a:ext cx="7414200" cy="400200"/>
-          </a:xfrm>
-          <a:prstGeom prst="rect">
-            <a:avLst/>
-          </a:prstGeom>
-          <a:noFill/>
-          <a:ln>
-            <a:noFill/>
-          </a:ln>
-        </p:spPr>
-        <p:txBody>
-          <a:bodyPr spcFirstLastPara="1" wrap="square" lIns="91425" tIns="91425" rIns="91425" bIns="91425" anchor="t" anchorCtr="0">
-            <a:spAutoFit/>
-          </a:bodyPr>
-          <a:lstStyle/>
-          <a:p>
-            <a:pPr marL="0" lvl="0" indent="0" algn="l" rtl="0">
-              <a:spcBef>
-                <a:spcPts val="0"/>
-              </a:spcBef>
-              <a:spcAft>
-                <a:spcPts val="0"/>
-              </a:spcAft>
-              <a:buNone/>
-            </a:pPr>
-            <a:endParaRPr/>
-          </a:p>
-        </p:txBody>
-      </p:sp>
     </p:spTree>
   </p:cSld>
   <p:clrMapOvr>
@@ -19011,7 +20235,7 @@
 </p:sld>
 </file>
 
-<file path=ppt/slides/slide4.xml><?xml version="1.0" encoding="utf-8"?>
+<file path=ppt/slides/slide5.xml><?xml version="1.0" encoding="utf-8"?>
 <p:sld xmlns:a="http://schemas.openxmlformats.org/drawingml/2006/main" xmlns:r="http://schemas.openxmlformats.org/officeDocument/2006/relationships" xmlns:p="http://schemas.openxmlformats.org/presentationml/2006/main">
   <p:cSld>
     <p:bg>
@@ -20271,7 +21495,7 @@
 </p:sld>
 </file>
 
-<file path=ppt/slides/slide5.xml><?xml version="1.0" encoding="utf-8"?>
+<file path=ppt/slides/slide6.xml><?xml version="1.0" encoding="utf-8"?>
 <p:sld xmlns:a="http://schemas.openxmlformats.org/drawingml/2006/main" xmlns:r="http://schemas.openxmlformats.org/officeDocument/2006/relationships" xmlns:p="http://schemas.openxmlformats.org/presentationml/2006/main">
   <p:cSld>
     <p:bg>
@@ -22575,7 +23799,7 @@
 </p:sld>
 </file>
 
-<file path=ppt/slides/slide6.xml><?xml version="1.0" encoding="utf-8"?>
+<file path=ppt/slides/slide7.xml><?xml version="1.0" encoding="utf-8"?>
 <p:sld xmlns:a="http://schemas.openxmlformats.org/drawingml/2006/main" xmlns:r="http://schemas.openxmlformats.org/officeDocument/2006/relationships" xmlns:p="http://schemas.openxmlformats.org/presentationml/2006/main">
   <p:cSld>
     <p:bg>
@@ -23944,7 +25168,7 @@
 </p:sld>
 </file>
 
-<file path=ppt/slides/slide7.xml><?xml version="1.0" encoding="utf-8"?>
+<file path=ppt/slides/slide8.xml><?xml version="1.0" encoding="utf-8"?>
 <p:sld xmlns:a="http://schemas.openxmlformats.org/drawingml/2006/main" xmlns:r="http://schemas.openxmlformats.org/officeDocument/2006/relationships" xmlns:p="http://schemas.openxmlformats.org/presentationml/2006/main">
   <p:cSld>
     <p:bg>
@@ -25161,7 +26385,7 @@
               <a:buNone/>
             </a:pPr>
             <a:r>
-              <a:rPr lang="en-US" sz="1200" b="1" i="0" u="none" strike="noStrike" cap="none" dirty="0">
+              <a:rPr lang="en-US" b="1" i="0" u="none" strike="noStrike" cap="none" dirty="0">
                 <a:solidFill>
                   <a:srgbClr val="0E7C7B"/>
                 </a:solidFill>
@@ -25173,7 +26397,7 @@
               <a:t>Covered today:  </a:t>
             </a:r>
             <a:r>
-              <a:rPr lang="en-US" sz="1200" b="0" i="0" u="none" strike="noStrike" cap="none" dirty="0">
+              <a:rPr lang="en-US" b="0" i="0" u="none" strike="noStrike" cap="none" dirty="0">
                 <a:solidFill>
                   <a:srgbClr val="1B2A33"/>
                 </a:solidFill>
@@ -25185,7 +26409,7 @@
               <a:t>All data in </a:t>
             </a:r>
             <a:r>
-              <a:rPr lang="en-US" sz="1200" b="0" i="0" u="none" strike="noStrike" cap="none" dirty="0" err="1">
+              <a:rPr lang="en-US" b="0" i="0" u="none" strike="noStrike" cap="none" dirty="0" err="1">
                 <a:solidFill>
                   <a:srgbClr val="1B2A33"/>
                 </a:solidFill>
@@ -25197,7 +26421,7 @@
               <a:t>OneLake</a:t>
             </a:r>
             <a:r>
-              <a:rPr lang="en-US" sz="1200" b="0" i="0" u="none" strike="noStrike" cap="none" dirty="0">
+              <a:rPr lang="en-US" b="0" i="0" u="none" strike="noStrike" cap="none" dirty="0">
                 <a:solidFill>
                   <a:srgbClr val="1B2A33"/>
                 </a:solidFill>
@@ -25206,10 +26430,10 @@
                 <a:cs typeface="Calibri"/>
                 <a:sym typeface="Calibri"/>
               </a:rPr>
-              <a:t> — via Lakehouse, Warehouse, Notebooks, SQL Database and 10+ more items (GA); </a:t>
-            </a:r>
-            <a:r>
-              <a:rPr lang="en-US" sz="1200" b="0" i="0" u="none" strike="noStrike" cap="none" dirty="0" err="1">
+              <a:t> : via Lakehouse, Warehouse, Notebooks, SQL Database and 10+ more items (GA); </a:t>
+            </a:r>
+            <a:r>
+              <a:rPr lang="en-US" b="0" i="0" u="none" strike="noStrike" cap="none" dirty="0" err="1">
                 <a:solidFill>
                   <a:srgbClr val="1B2A33"/>
                 </a:solidFill>
@@ -25221,7 +26445,7 @@
               <a:t>Eventhouse</a:t>
             </a:r>
             <a:r>
-              <a:rPr lang="en-US" sz="1200" b="0" i="0" u="none" strike="noStrike" cap="none" dirty="0">
+              <a:rPr lang="en-US" b="0" i="0" u="none" strike="noStrike" cap="none" dirty="0">
                 <a:solidFill>
                   <a:srgbClr val="1B2A33"/>
                 </a:solidFill>
@@ -25231,126 +26455,6 @@
                 <a:sym typeface="Calibri"/>
               </a:rPr>
               <a:t> (preview).</a:t>
-            </a:r>
-            <a:endParaRPr sz="1200" b="0" i="0" u="none" strike="noStrike" cap="none" dirty="0">
-              <a:solidFill>
-                <a:schemeClr val="dk1"/>
-              </a:solidFill>
-              <a:latin typeface="Calibri"/>
-              <a:ea typeface="Calibri"/>
-              <a:cs typeface="Calibri"/>
-              <a:sym typeface="Calibri"/>
-            </a:endParaRPr>
-          </a:p>
-        </p:txBody>
-      </p:sp>
-      <p:sp>
-        <p:nvSpPr>
-          <p:cNvPr id="170" name="Google Shape;170;p8"/>
-          <p:cNvSpPr/>
-          <p:nvPr/>
-        </p:nvSpPr>
-        <p:spPr>
-          <a:xfrm>
-            <a:off x="6126480" y="5212080"/>
-            <a:ext cx="5257800" cy="960120"/>
-          </a:xfrm>
-          <a:prstGeom prst="roundRect">
-            <a:avLst>
-              <a:gd name="adj" fmla="val 7619"/>
-            </a:avLst>
-          </a:prstGeom>
-          <a:solidFill>
-            <a:srgbClr val="EAF2F1"/>
-          </a:solidFill>
-          <a:ln>
-            <a:noFill/>
-          </a:ln>
-        </p:spPr>
-        <p:txBody>
-          <a:bodyPr spcFirstLastPara="1" wrap="square" lIns="91425" tIns="91425" rIns="91425" bIns="91425" anchor="ctr" anchorCtr="0">
-            <a:noAutofit/>
-          </a:bodyPr>
-          <a:lstStyle/>
-          <a:p>
-            <a:pPr marL="0" lvl="0" indent="0" algn="l" rtl="0">
-              <a:spcBef>
-                <a:spcPts val="0"/>
-              </a:spcBef>
-              <a:spcAft>
-                <a:spcPts val="0"/>
-              </a:spcAft>
-              <a:buNone/>
-            </a:pPr>
-            <a:endParaRPr/>
-          </a:p>
-        </p:txBody>
-      </p:sp>
-      <p:sp>
-        <p:nvSpPr>
-          <p:cNvPr id="171" name="Google Shape;171;p8"/>
-          <p:cNvSpPr/>
-          <p:nvPr/>
-        </p:nvSpPr>
-        <p:spPr>
-          <a:xfrm>
-            <a:off x="6355080" y="5285232"/>
-            <a:ext cx="4846320" cy="822960"/>
-          </a:xfrm>
-          <a:prstGeom prst="rect">
-            <a:avLst/>
-          </a:prstGeom>
-          <a:noFill/>
-          <a:ln>
-            <a:noFill/>
-          </a:ln>
-        </p:spPr>
-        <p:txBody>
-          <a:bodyPr spcFirstLastPara="1" wrap="square" lIns="0" tIns="0" rIns="0" bIns="0" anchor="ctr" anchorCtr="0">
-            <a:noAutofit/>
-          </a:bodyPr>
-          <a:lstStyle/>
-          <a:p>
-            <a:pPr marL="0" marR="0" lvl="0" indent="0" algn="l" rtl="0">
-              <a:lnSpc>
-                <a:spcPct val="130434"/>
-              </a:lnSpc>
-              <a:spcBef>
-                <a:spcPts val="0"/>
-              </a:spcBef>
-              <a:spcAft>
-                <a:spcPts val="0"/>
-              </a:spcAft>
-              <a:buClr>
-                <a:srgbClr val="0E7C7B"/>
-              </a:buClr>
-              <a:buSzPts val="1150"/>
-              <a:buFont typeface="Calibri"/>
-              <a:buNone/>
-            </a:pPr>
-            <a:r>
-              <a:rPr lang="en-US" b="1" i="0" u="none" strike="noStrike" cap="none" dirty="0">
-                <a:solidFill>
-                  <a:srgbClr val="0E7C7B"/>
-                </a:solidFill>
-                <a:latin typeface="Calibri"/>
-                <a:ea typeface="Calibri"/>
-                <a:cs typeface="Calibri"/>
-                <a:sym typeface="Calibri"/>
-              </a:rPr>
-              <a:t>Recent win:  </a:t>
-            </a:r>
-            <a:r>
-              <a:rPr lang="en-US" b="0" i="0" u="none" strike="noStrike" cap="none" dirty="0">
-                <a:solidFill>
-                  <a:srgbClr val="1B2A33"/>
-                </a:solidFill>
-                <a:latin typeface="Calibri"/>
-                <a:ea typeface="Calibri"/>
-                <a:cs typeface="Calibri"/>
-                <a:sym typeface="Calibri"/>
-              </a:rPr>
-              <a:t>CMK now works in BYOK-enabled capacities — no separate capacities needed (preview).</a:t>
             </a:r>
             <a:endParaRPr b="0" i="0" u="none" strike="noStrike" cap="none" dirty="0">
               <a:solidFill>
@@ -25366,6 +26470,126 @@
       </p:sp>
       <p:sp>
         <p:nvSpPr>
+          <p:cNvPr id="170" name="Google Shape;170;p8"/>
+          <p:cNvSpPr/>
+          <p:nvPr/>
+        </p:nvSpPr>
+        <p:spPr>
+          <a:xfrm>
+            <a:off x="6126480" y="5212080"/>
+            <a:ext cx="5257800" cy="960120"/>
+          </a:xfrm>
+          <a:prstGeom prst="roundRect">
+            <a:avLst>
+              <a:gd name="adj" fmla="val 7619"/>
+            </a:avLst>
+          </a:prstGeom>
+          <a:solidFill>
+            <a:srgbClr val="EAF2F1"/>
+          </a:solidFill>
+          <a:ln>
+            <a:noFill/>
+          </a:ln>
+        </p:spPr>
+        <p:txBody>
+          <a:bodyPr spcFirstLastPara="1" wrap="square" lIns="91425" tIns="91425" rIns="91425" bIns="91425" anchor="ctr" anchorCtr="0">
+            <a:noAutofit/>
+          </a:bodyPr>
+          <a:lstStyle/>
+          <a:p>
+            <a:pPr marL="0" lvl="0" indent="0" algn="l" rtl="0">
+              <a:spcBef>
+                <a:spcPts val="0"/>
+              </a:spcBef>
+              <a:spcAft>
+                <a:spcPts val="0"/>
+              </a:spcAft>
+              <a:buNone/>
+            </a:pPr>
+            <a:endParaRPr/>
+          </a:p>
+        </p:txBody>
+      </p:sp>
+      <p:sp>
+        <p:nvSpPr>
+          <p:cNvPr id="171" name="Google Shape;171;p8"/>
+          <p:cNvSpPr/>
+          <p:nvPr/>
+        </p:nvSpPr>
+        <p:spPr>
+          <a:xfrm>
+            <a:off x="6355080" y="5285232"/>
+            <a:ext cx="4846320" cy="822960"/>
+          </a:xfrm>
+          <a:prstGeom prst="rect">
+            <a:avLst/>
+          </a:prstGeom>
+          <a:noFill/>
+          <a:ln>
+            <a:noFill/>
+          </a:ln>
+        </p:spPr>
+        <p:txBody>
+          <a:bodyPr spcFirstLastPara="1" wrap="square" lIns="0" tIns="0" rIns="0" bIns="0" anchor="ctr" anchorCtr="0">
+            <a:noAutofit/>
+          </a:bodyPr>
+          <a:lstStyle/>
+          <a:p>
+            <a:pPr marL="0" marR="0" lvl="0" indent="0" algn="l" rtl="0">
+              <a:lnSpc>
+                <a:spcPct val="130434"/>
+              </a:lnSpc>
+              <a:spcBef>
+                <a:spcPts val="0"/>
+              </a:spcBef>
+              <a:spcAft>
+                <a:spcPts val="0"/>
+              </a:spcAft>
+              <a:buClr>
+                <a:srgbClr val="0E7C7B"/>
+              </a:buClr>
+              <a:buSzPts val="1150"/>
+              <a:buFont typeface="Calibri"/>
+              <a:buNone/>
+            </a:pPr>
+            <a:r>
+              <a:rPr lang="en-US" b="1" i="0" u="none" strike="noStrike" cap="none" dirty="0">
+                <a:solidFill>
+                  <a:srgbClr val="0E7C7B"/>
+                </a:solidFill>
+                <a:latin typeface="Calibri"/>
+                <a:ea typeface="Calibri"/>
+                <a:cs typeface="Calibri"/>
+                <a:sym typeface="Calibri"/>
+              </a:rPr>
+              <a:t>Recent win:  </a:t>
+            </a:r>
+            <a:r>
+              <a:rPr lang="en-US" b="0" i="0" u="none" strike="noStrike" cap="none" dirty="0">
+                <a:solidFill>
+                  <a:srgbClr val="1B2A33"/>
+                </a:solidFill>
+                <a:latin typeface="Calibri"/>
+                <a:ea typeface="Calibri"/>
+                <a:cs typeface="Calibri"/>
+                <a:sym typeface="Calibri"/>
+              </a:rPr>
+              <a:t>CMK now works in BYOK-enabled capacities — no separate capacities needed (preview).</a:t>
+            </a:r>
+            <a:endParaRPr b="0" i="0" u="none" strike="noStrike" cap="none" dirty="0">
+              <a:solidFill>
+                <a:schemeClr val="dk1"/>
+              </a:solidFill>
+              <a:latin typeface="Calibri"/>
+              <a:ea typeface="Calibri"/>
+              <a:cs typeface="Calibri"/>
+              <a:sym typeface="Calibri"/>
+            </a:endParaRPr>
+          </a:p>
+        </p:txBody>
+      </p:sp>
+      <p:sp>
+        <p:nvSpPr>
           <p:cNvPr id="172" name="Google Shape;172;p8"/>
           <p:cNvSpPr/>
           <p:nvPr/>
@@ -25498,7 +26722,7 @@
 </p:sld>
 </file>
 
-<file path=ppt/slides/slide8.xml><?xml version="1.0" encoding="utf-8"?>
+<file path=ppt/slides/slide9.xml><?xml version="1.0" encoding="utf-8"?>
 <p:sld xmlns:a="http://schemas.openxmlformats.org/drawingml/2006/main" xmlns:r="http://schemas.openxmlformats.org/officeDocument/2006/relationships" xmlns:p="http://schemas.openxmlformats.org/presentationml/2006/main">
   <p:cSld>
     <p:bg>
@@ -27261,1147 +28485,6 @@
                 <a:sym typeface="Calibri"/>
               </a:rPr>
               <a:t>8</a:t>
-            </a:r>
-            <a:endParaRPr sz="900" b="0" i="0" u="none" strike="noStrike" cap="none">
-              <a:solidFill>
-                <a:schemeClr val="dk1"/>
-              </a:solidFill>
-              <a:latin typeface="Calibri"/>
-              <a:ea typeface="Calibri"/>
-              <a:cs typeface="Calibri"/>
-              <a:sym typeface="Calibri"/>
-            </a:endParaRPr>
-          </a:p>
-        </p:txBody>
-      </p:sp>
-    </p:spTree>
-  </p:cSld>
-  <p:clrMapOvr>
-    <a:masterClrMapping/>
-  </p:clrMapOvr>
-</p:sld>
-</file>
-
-<file path=ppt/slides/slide9.xml><?xml version="1.0" encoding="utf-8"?>
-<p:sld xmlns:a="http://schemas.openxmlformats.org/drawingml/2006/main" xmlns:r="http://schemas.openxmlformats.org/officeDocument/2006/relationships" xmlns:p="http://schemas.openxmlformats.org/presentationml/2006/main">
-  <p:cSld>
-    <p:bg>
-      <p:bgPr>
-        <a:solidFill>
-          <a:srgbClr val="1B2A33"/>
-        </a:solidFill>
-        <a:effectLst/>
-      </p:bgPr>
-    </p:bg>
-    <p:spTree>
-      <p:nvGrpSpPr>
-        <p:cNvPr id="1" name="Shape 212"/>
-        <p:cNvGrpSpPr/>
-        <p:nvPr/>
-      </p:nvGrpSpPr>
-      <p:grpSpPr>
-        <a:xfrm>
-          <a:off x="0" y="0"/>
-          <a:ext cx="0" cy="0"/>
-          <a:chOff x="0" y="0"/>
-          <a:chExt cx="0" cy="0"/>
-        </a:xfrm>
-      </p:grpSpPr>
-      <p:sp>
-        <p:nvSpPr>
-          <p:cNvPr id="213" name="Google Shape;213;p10"/>
-          <p:cNvSpPr/>
-          <p:nvPr/>
-        </p:nvSpPr>
-        <p:spPr>
-          <a:xfrm>
-            <a:off x="640080" y="548640"/>
-            <a:ext cx="5486400" cy="274320"/>
-          </a:xfrm>
-          <a:prstGeom prst="rect">
-            <a:avLst/>
-          </a:prstGeom>
-          <a:noFill/>
-          <a:ln>
-            <a:noFill/>
-          </a:ln>
-        </p:spPr>
-        <p:txBody>
-          <a:bodyPr spcFirstLastPara="1" wrap="square" lIns="0" tIns="0" rIns="0" bIns="0" anchor="ctr" anchorCtr="0">
-            <a:noAutofit/>
-          </a:bodyPr>
-          <a:lstStyle/>
-          <a:p>
-            <a:pPr marL="0" marR="0" lvl="0" indent="0" algn="l" rtl="0">
-              <a:spcBef>
-                <a:spcPts val="0"/>
-              </a:spcBef>
-              <a:spcAft>
-                <a:spcPts val="0"/>
-              </a:spcAft>
-              <a:buClr>
-                <a:srgbClr val="7FE3D3"/>
-              </a:buClr>
-              <a:buSzPts val="1200"/>
-              <a:buFont typeface="Calibri"/>
-              <a:buNone/>
-            </a:pPr>
-            <a:r>
-              <a:rPr lang="en-US" sz="1200" b="1" i="0" u="none" strike="noStrike" cap="none">
-                <a:solidFill>
-                  <a:srgbClr val="7FE3D3"/>
-                </a:solidFill>
-                <a:latin typeface="Calibri"/>
-                <a:ea typeface="Calibri"/>
-                <a:cs typeface="Calibri"/>
-                <a:sym typeface="Calibri"/>
-              </a:rPr>
-              <a:t>THE TRUST MODEL</a:t>
-            </a:r>
-            <a:endParaRPr sz="1200" b="0" i="0" u="none" strike="noStrike" cap="none">
-              <a:solidFill>
-                <a:schemeClr val="dk1"/>
-              </a:solidFill>
-              <a:latin typeface="Calibri"/>
-              <a:ea typeface="Calibri"/>
-              <a:cs typeface="Calibri"/>
-              <a:sym typeface="Calibri"/>
-            </a:endParaRPr>
-          </a:p>
-        </p:txBody>
-      </p:sp>
-      <p:sp>
-        <p:nvSpPr>
-          <p:cNvPr id="214" name="Google Shape;214;p10"/>
-          <p:cNvSpPr/>
-          <p:nvPr/>
-        </p:nvSpPr>
-        <p:spPr>
-          <a:xfrm>
-            <a:off x="640080" y="566928"/>
-            <a:ext cx="10972800" cy="822960"/>
-          </a:xfrm>
-          <a:prstGeom prst="rect">
-            <a:avLst/>
-          </a:prstGeom>
-          <a:noFill/>
-          <a:ln>
-            <a:noFill/>
-          </a:ln>
-        </p:spPr>
-        <p:txBody>
-          <a:bodyPr spcFirstLastPara="1" wrap="square" lIns="0" tIns="0" rIns="0" bIns="0" anchor="ctr" anchorCtr="0">
-            <a:noAutofit/>
-          </a:bodyPr>
-          <a:lstStyle/>
-          <a:p>
-            <a:pPr marL="0" marR="0" lvl="0" indent="0" algn="l" rtl="0">
-              <a:spcBef>
-                <a:spcPts val="0"/>
-              </a:spcBef>
-              <a:spcAft>
-                <a:spcPts val="0"/>
-              </a:spcAft>
-              <a:buClr>
-                <a:srgbClr val="FFFFFF"/>
-              </a:buClr>
-              <a:buSzPts val="3200"/>
-              <a:buFont typeface="Cambria"/>
-              <a:buNone/>
-            </a:pPr>
-            <a:r>
-              <a:rPr lang="en-US" sz="3200" b="1" i="0" u="none" strike="noStrike" cap="none">
-                <a:solidFill>
-                  <a:srgbClr val="FFFFFF"/>
-                </a:solidFill>
-                <a:latin typeface="Cambria"/>
-                <a:ea typeface="Cambria"/>
-                <a:cs typeface="Cambria"/>
-                <a:sym typeface="Cambria"/>
-              </a:rPr>
-              <a:t>But does the key live inside Microsoft?</a:t>
-            </a:r>
-            <a:endParaRPr sz="3200" b="0" i="0" u="none" strike="noStrike" cap="none">
-              <a:solidFill>
-                <a:schemeClr val="dk1"/>
-              </a:solidFill>
-              <a:latin typeface="Calibri"/>
-              <a:ea typeface="Calibri"/>
-              <a:cs typeface="Calibri"/>
-              <a:sym typeface="Calibri"/>
-            </a:endParaRPr>
-          </a:p>
-        </p:txBody>
-      </p:sp>
-      <p:sp>
-        <p:nvSpPr>
-          <p:cNvPr id="215" name="Google Shape;215;p10"/>
-          <p:cNvSpPr/>
-          <p:nvPr/>
-        </p:nvSpPr>
-        <p:spPr>
-          <a:xfrm>
-            <a:off x="640080" y="1499616"/>
-            <a:ext cx="5349240" cy="3657600"/>
-          </a:xfrm>
-          <a:prstGeom prst="roundRect">
-            <a:avLst>
-              <a:gd name="adj" fmla="val 2000"/>
-            </a:avLst>
-          </a:prstGeom>
-          <a:solidFill>
-            <a:srgbClr val="16323A"/>
-          </a:solidFill>
-          <a:ln w="12700" cap="flat" cmpd="sng">
-            <a:solidFill>
-              <a:srgbClr val="3AAFA9"/>
-            </a:solidFill>
-            <a:prstDash val="solid"/>
-            <a:round/>
-            <a:headEnd type="none" w="sm" len="sm"/>
-            <a:tailEnd type="none" w="sm" len="sm"/>
-          </a:ln>
-        </p:spPr>
-        <p:txBody>
-          <a:bodyPr spcFirstLastPara="1" wrap="square" lIns="91425" tIns="91425" rIns="91425" bIns="91425" anchor="ctr" anchorCtr="0">
-            <a:noAutofit/>
-          </a:bodyPr>
-          <a:lstStyle/>
-          <a:p>
-            <a:pPr marL="0" lvl="0" indent="0" algn="l" rtl="0">
-              <a:spcBef>
-                <a:spcPts val="0"/>
-              </a:spcBef>
-              <a:spcAft>
-                <a:spcPts val="0"/>
-              </a:spcAft>
-              <a:buNone/>
-            </a:pPr>
-            <a:endParaRPr/>
-          </a:p>
-        </p:txBody>
-      </p:sp>
-      <p:sp>
-        <p:nvSpPr>
-          <p:cNvPr id="216" name="Google Shape;216;p10"/>
-          <p:cNvSpPr/>
-          <p:nvPr/>
-        </p:nvSpPr>
-        <p:spPr>
-          <a:xfrm>
-            <a:off x="960120" y="1819656"/>
-            <a:ext cx="713232" cy="713232"/>
-          </a:xfrm>
-          <a:prstGeom prst="ellipse">
-            <a:avLst/>
-          </a:prstGeom>
-          <a:solidFill>
-            <a:srgbClr val="0E7C7B"/>
-          </a:solidFill>
-          <a:ln>
-            <a:noFill/>
-          </a:ln>
-          <a:effectLst>
-            <a:outerShdw blurRad="63500" dist="25400" dir="5400000" algn="bl" rotWithShape="0">
-              <a:srgbClr val="000000">
-                <a:alpha val="18039"/>
-              </a:srgbClr>
-            </a:outerShdw>
-          </a:effectLst>
-        </p:spPr>
-        <p:txBody>
-          <a:bodyPr spcFirstLastPara="1" wrap="square" lIns="91425" tIns="91425" rIns="91425" bIns="91425" anchor="ctr" anchorCtr="0">
-            <a:noAutofit/>
-          </a:bodyPr>
-          <a:lstStyle/>
-          <a:p>
-            <a:pPr marL="0" lvl="0" indent="0" algn="l" rtl="0">
-              <a:spcBef>
-                <a:spcPts val="0"/>
-              </a:spcBef>
-              <a:spcAft>
-                <a:spcPts val="0"/>
-              </a:spcAft>
-              <a:buNone/>
-            </a:pPr>
-            <a:endParaRPr/>
-          </a:p>
-        </p:txBody>
-      </p:sp>
-      <p:pic>
-        <p:nvPicPr>
-          <p:cNvPr id="217" name="Google Shape;217;p10" descr="preencoded.png"/>
-          <p:cNvPicPr preferRelativeResize="0"/>
-          <p:nvPr/>
-        </p:nvPicPr>
-        <p:blipFill rotWithShape="1">
-          <a:blip r:embed="rId3">
-            <a:alphaModFix/>
-          </a:blip>
-          <a:srcRect/>
-          <a:stretch/>
-        </p:blipFill>
-        <p:spPr>
-          <a:xfrm>
-            <a:off x="1152693" y="2012229"/>
-            <a:ext cx="328087" cy="328087"/>
-          </a:xfrm>
-          <a:prstGeom prst="rect">
-            <a:avLst/>
-          </a:prstGeom>
-          <a:noFill/>
-          <a:ln>
-            <a:noFill/>
-          </a:ln>
-        </p:spPr>
-      </p:pic>
-      <p:sp>
-        <p:nvSpPr>
-          <p:cNvPr id="218" name="Google Shape;218;p10"/>
-          <p:cNvSpPr/>
-          <p:nvPr/>
-        </p:nvSpPr>
-        <p:spPr>
-          <a:xfrm>
-            <a:off x="1874520" y="1911096"/>
-            <a:ext cx="3840480" cy="548640"/>
-          </a:xfrm>
-          <a:prstGeom prst="rect">
-            <a:avLst/>
-          </a:prstGeom>
-          <a:noFill/>
-          <a:ln>
-            <a:noFill/>
-          </a:ln>
-        </p:spPr>
-        <p:txBody>
-          <a:bodyPr spcFirstLastPara="1" wrap="square" lIns="0" tIns="0" rIns="0" bIns="0" anchor="ctr" anchorCtr="0">
-            <a:noAutofit/>
-          </a:bodyPr>
-          <a:lstStyle/>
-          <a:p>
-            <a:pPr marL="0" marR="0" lvl="0" indent="0" algn="l" rtl="0">
-              <a:spcBef>
-                <a:spcPts val="0"/>
-              </a:spcBef>
-              <a:spcAft>
-                <a:spcPts val="0"/>
-              </a:spcAft>
-              <a:buClr>
-                <a:srgbClr val="FFFFFF"/>
-              </a:buClr>
-              <a:buSzPts val="1550"/>
-              <a:buFont typeface="Calibri"/>
-              <a:buNone/>
-            </a:pPr>
-            <a:r>
-              <a:rPr lang="en-US" sz="1800" b="1" i="0" u="none" strike="noStrike" cap="none" dirty="0">
-                <a:solidFill>
-                  <a:srgbClr val="FFFFFF"/>
-                </a:solidFill>
-                <a:latin typeface="Calibri"/>
-                <a:ea typeface="Calibri"/>
-                <a:cs typeface="Calibri"/>
-                <a:sym typeface="Calibri"/>
-              </a:rPr>
-              <a:t>Yes, the hardware is Microsoft's</a:t>
-            </a:r>
-            <a:endParaRPr sz="1800" b="0" i="0" u="none" strike="noStrike" cap="none" dirty="0">
-              <a:solidFill>
-                <a:schemeClr val="dk1"/>
-              </a:solidFill>
-              <a:latin typeface="Calibri"/>
-              <a:ea typeface="Calibri"/>
-              <a:cs typeface="Calibri"/>
-              <a:sym typeface="Calibri"/>
-            </a:endParaRPr>
-          </a:p>
-        </p:txBody>
-      </p:sp>
-      <p:sp>
-        <p:nvSpPr>
-          <p:cNvPr id="219" name="Google Shape;219;p10"/>
-          <p:cNvSpPr/>
-          <p:nvPr/>
-        </p:nvSpPr>
-        <p:spPr>
-          <a:xfrm>
-            <a:off x="1051560" y="2779776"/>
-            <a:ext cx="4754880" cy="2103120"/>
-          </a:xfrm>
-          <a:prstGeom prst="rect">
-            <a:avLst/>
-          </a:prstGeom>
-          <a:noFill/>
-          <a:ln>
-            <a:noFill/>
-          </a:ln>
-        </p:spPr>
-        <p:txBody>
-          <a:bodyPr spcFirstLastPara="1" wrap="square" lIns="0" tIns="0" rIns="0" bIns="0" anchor="ctr" anchorCtr="0">
-            <a:noAutofit/>
-          </a:bodyPr>
-          <a:lstStyle/>
-          <a:p>
-            <a:pPr marL="342900" marR="0" lvl="0" indent="-342900" algn="l" rtl="0">
-              <a:lnSpc>
-                <a:spcPct val="169230"/>
-              </a:lnSpc>
-              <a:spcBef>
-                <a:spcPts val="0"/>
-              </a:spcBef>
-              <a:spcAft>
-                <a:spcPts val="0"/>
-              </a:spcAft>
-              <a:buClr>
-                <a:srgbClr val="C9D6DB"/>
-              </a:buClr>
-              <a:buSzPts val="1300"/>
-              <a:buFont typeface="Calibri"/>
-              <a:buChar char="•"/>
-            </a:pPr>
-            <a:r>
-              <a:rPr lang="en-US" b="0" i="0" u="none" strike="noStrike" cap="none" dirty="0">
-                <a:solidFill>
-                  <a:srgbClr val="C9D6DB"/>
-                </a:solidFill>
-                <a:latin typeface="Calibri"/>
-                <a:ea typeface="Calibri"/>
-                <a:cs typeface="Calibri"/>
-                <a:sym typeface="Calibri"/>
-              </a:rPr>
-              <a:t>Runs in Microsoft datacenters</a:t>
-            </a:r>
-            <a:endParaRPr b="0" i="0" u="none" strike="noStrike" cap="none" dirty="0">
-              <a:solidFill>
-                <a:schemeClr val="dk1"/>
-              </a:solidFill>
-              <a:latin typeface="Calibri"/>
-              <a:ea typeface="Calibri"/>
-              <a:cs typeface="Calibri"/>
-              <a:sym typeface="Calibri"/>
-            </a:endParaRPr>
-          </a:p>
-          <a:p>
-            <a:pPr marL="342900" marR="0" lvl="0" indent="-342900" algn="l" rtl="0">
-              <a:lnSpc>
-                <a:spcPct val="169230"/>
-              </a:lnSpc>
-              <a:spcBef>
-                <a:spcPts val="0"/>
-              </a:spcBef>
-              <a:spcAft>
-                <a:spcPts val="0"/>
-              </a:spcAft>
-              <a:buClr>
-                <a:srgbClr val="C9D6DB"/>
-              </a:buClr>
-              <a:buSzPts val="1300"/>
-              <a:buFont typeface="Calibri"/>
-              <a:buChar char="•"/>
-            </a:pPr>
-            <a:r>
-              <a:rPr lang="en-US" b="0" i="0" u="none" strike="noStrike" cap="none" dirty="0">
-                <a:solidFill>
-                  <a:srgbClr val="C9D6DB"/>
-                </a:solidFill>
-                <a:latin typeface="Calibri"/>
-                <a:ea typeface="Calibri"/>
-                <a:cs typeface="Calibri"/>
-                <a:sym typeface="Calibri"/>
-              </a:rPr>
-              <a:t>Microsoft patches &amp; maintains the machines</a:t>
-            </a:r>
-            <a:endParaRPr b="0" i="0" u="none" strike="noStrike" cap="none" dirty="0">
-              <a:solidFill>
-                <a:schemeClr val="dk1"/>
-              </a:solidFill>
-              <a:latin typeface="Calibri"/>
-              <a:ea typeface="Calibri"/>
-              <a:cs typeface="Calibri"/>
-              <a:sym typeface="Calibri"/>
-            </a:endParaRPr>
-          </a:p>
-          <a:p>
-            <a:pPr marL="342900" marR="0" lvl="0" indent="-342900" algn="l" rtl="0">
-              <a:lnSpc>
-                <a:spcPct val="169230"/>
-              </a:lnSpc>
-              <a:spcBef>
-                <a:spcPts val="0"/>
-              </a:spcBef>
-              <a:spcAft>
-                <a:spcPts val="0"/>
-              </a:spcAft>
-              <a:buClr>
-                <a:srgbClr val="C9D6DB"/>
-              </a:buClr>
-              <a:buSzPts val="1300"/>
-              <a:buFont typeface="Calibri"/>
-              <a:buChar char="•"/>
-            </a:pPr>
-            <a:r>
-              <a:rPr lang="en-US" b="0" i="0" u="none" strike="noStrike" cap="none" dirty="0">
-                <a:solidFill>
-                  <a:srgbClr val="C9D6DB"/>
-                </a:solidFill>
-                <a:latin typeface="Calibri"/>
-                <a:ea typeface="Calibri"/>
-                <a:cs typeface="Calibri"/>
-                <a:sym typeface="Calibri"/>
-              </a:rPr>
-              <a:t>“Managed” means they manage the hardware</a:t>
-            </a:r>
-            <a:endParaRPr b="0" i="0" u="none" strike="noStrike" cap="none" dirty="0">
-              <a:solidFill>
-                <a:schemeClr val="dk1"/>
-              </a:solidFill>
-              <a:latin typeface="Calibri"/>
-              <a:ea typeface="Calibri"/>
-              <a:cs typeface="Calibri"/>
-              <a:sym typeface="Calibri"/>
-            </a:endParaRPr>
-          </a:p>
-          <a:p>
-            <a:pPr marL="342900" marR="0" lvl="0" indent="-342900" algn="l" rtl="0">
-              <a:lnSpc>
-                <a:spcPct val="169230"/>
-              </a:lnSpc>
-              <a:spcBef>
-                <a:spcPts val="0"/>
-              </a:spcBef>
-              <a:spcAft>
-                <a:spcPts val="0"/>
-              </a:spcAft>
-              <a:buClr>
-                <a:srgbClr val="C9D6DB"/>
-              </a:buClr>
-              <a:buSzPts val="1300"/>
-              <a:buFont typeface="Calibri"/>
-              <a:buChar char="•"/>
-            </a:pPr>
-            <a:r>
-              <a:rPr lang="en-US" b="0" i="0" u="none" strike="noStrike" cap="none" dirty="0">
-                <a:solidFill>
-                  <a:srgbClr val="C9D6DB"/>
-                </a:solidFill>
-                <a:latin typeface="Calibri"/>
-                <a:ea typeface="Calibri"/>
-                <a:cs typeface="Calibri"/>
-                <a:sym typeface="Calibri"/>
-              </a:rPr>
-              <a:t>You don't host a physical device</a:t>
-            </a:r>
-            <a:endParaRPr b="0" i="0" u="none" strike="noStrike" cap="none" dirty="0">
-              <a:solidFill>
-                <a:schemeClr val="dk1"/>
-              </a:solidFill>
-              <a:latin typeface="Calibri"/>
-              <a:ea typeface="Calibri"/>
-              <a:cs typeface="Calibri"/>
-              <a:sym typeface="Calibri"/>
-            </a:endParaRPr>
-          </a:p>
-        </p:txBody>
-      </p:sp>
-      <p:sp>
-        <p:nvSpPr>
-          <p:cNvPr id="220" name="Google Shape;220;p10"/>
-          <p:cNvSpPr/>
-          <p:nvPr/>
-        </p:nvSpPr>
-        <p:spPr>
-          <a:xfrm>
-            <a:off x="6172200" y="1499616"/>
-            <a:ext cx="5349240" cy="3657600"/>
-          </a:xfrm>
-          <a:prstGeom prst="roundRect">
-            <a:avLst>
-              <a:gd name="adj" fmla="val 2000"/>
-            </a:avLst>
-          </a:prstGeom>
-          <a:solidFill>
-            <a:srgbClr val="0E7C7B"/>
-          </a:solidFill>
-          <a:ln>
-            <a:noFill/>
-          </a:ln>
-        </p:spPr>
-        <p:txBody>
-          <a:bodyPr spcFirstLastPara="1" wrap="square" lIns="91425" tIns="91425" rIns="91425" bIns="91425" anchor="ctr" anchorCtr="0">
-            <a:noAutofit/>
-          </a:bodyPr>
-          <a:lstStyle/>
-          <a:p>
-            <a:pPr marL="0" lvl="0" indent="0" algn="l" rtl="0">
-              <a:spcBef>
-                <a:spcPts val="0"/>
-              </a:spcBef>
-              <a:spcAft>
-                <a:spcPts val="0"/>
-              </a:spcAft>
-              <a:buNone/>
-            </a:pPr>
-            <a:endParaRPr/>
-          </a:p>
-        </p:txBody>
-      </p:sp>
-      <p:sp>
-        <p:nvSpPr>
-          <p:cNvPr id="221" name="Google Shape;221;p10"/>
-          <p:cNvSpPr/>
-          <p:nvPr/>
-        </p:nvSpPr>
-        <p:spPr>
-          <a:xfrm>
-            <a:off x="6492240" y="1819656"/>
-            <a:ext cx="713232" cy="713232"/>
-          </a:xfrm>
-          <a:prstGeom prst="ellipse">
-            <a:avLst/>
-          </a:prstGeom>
-          <a:solidFill>
-            <a:srgbClr val="1B2A33"/>
-          </a:solidFill>
-          <a:ln>
-            <a:noFill/>
-          </a:ln>
-          <a:effectLst>
-            <a:outerShdw blurRad="63500" dist="25400" dir="5400000" algn="bl" rotWithShape="0">
-              <a:srgbClr val="000000">
-                <a:alpha val="18039"/>
-              </a:srgbClr>
-            </a:outerShdw>
-          </a:effectLst>
-        </p:spPr>
-        <p:txBody>
-          <a:bodyPr spcFirstLastPara="1" wrap="square" lIns="91425" tIns="91425" rIns="91425" bIns="91425" anchor="ctr" anchorCtr="0">
-            <a:noAutofit/>
-          </a:bodyPr>
-          <a:lstStyle/>
-          <a:p>
-            <a:pPr marL="0" lvl="0" indent="0" algn="l" rtl="0">
-              <a:spcBef>
-                <a:spcPts val="0"/>
-              </a:spcBef>
-              <a:spcAft>
-                <a:spcPts val="0"/>
-              </a:spcAft>
-              <a:buNone/>
-            </a:pPr>
-            <a:endParaRPr/>
-          </a:p>
-        </p:txBody>
-      </p:sp>
-      <p:pic>
-        <p:nvPicPr>
-          <p:cNvPr id="222" name="Google Shape;222;p10" descr="preencoded.png"/>
-          <p:cNvPicPr preferRelativeResize="0"/>
-          <p:nvPr/>
-        </p:nvPicPr>
-        <p:blipFill rotWithShape="1">
-          <a:blip r:embed="rId4">
-            <a:alphaModFix/>
-          </a:blip>
-          <a:srcRect/>
-          <a:stretch/>
-        </p:blipFill>
-        <p:spPr>
-          <a:xfrm>
-            <a:off x="6684813" y="2012229"/>
-            <a:ext cx="328087" cy="328087"/>
-          </a:xfrm>
-          <a:prstGeom prst="rect">
-            <a:avLst/>
-          </a:prstGeom>
-          <a:noFill/>
-          <a:ln>
-            <a:noFill/>
-          </a:ln>
-        </p:spPr>
-      </p:pic>
-      <p:sp>
-        <p:nvSpPr>
-          <p:cNvPr id="223" name="Google Shape;223;p10"/>
-          <p:cNvSpPr/>
-          <p:nvPr/>
-        </p:nvSpPr>
-        <p:spPr>
-          <a:xfrm>
-            <a:off x="7406640" y="1911096"/>
-            <a:ext cx="3840480" cy="548640"/>
-          </a:xfrm>
-          <a:prstGeom prst="rect">
-            <a:avLst/>
-          </a:prstGeom>
-          <a:noFill/>
-          <a:ln>
-            <a:noFill/>
-          </a:ln>
-        </p:spPr>
-        <p:txBody>
-          <a:bodyPr spcFirstLastPara="1" wrap="square" lIns="0" tIns="0" rIns="0" bIns="0" anchor="ctr" anchorCtr="0">
-            <a:noAutofit/>
-          </a:bodyPr>
-          <a:lstStyle/>
-          <a:p>
-            <a:pPr marL="0" marR="0" lvl="0" indent="0" algn="l" rtl="0">
-              <a:spcBef>
-                <a:spcPts val="0"/>
-              </a:spcBef>
-              <a:spcAft>
-                <a:spcPts val="0"/>
-              </a:spcAft>
-              <a:buClr>
-                <a:srgbClr val="FFFFFF"/>
-              </a:buClr>
-              <a:buSzPts val="1550"/>
-              <a:buFont typeface="Calibri"/>
-              <a:buNone/>
-            </a:pPr>
-            <a:r>
-              <a:rPr lang="en-US" sz="1800" b="1" i="0" u="none" strike="noStrike" cap="none" dirty="0">
-                <a:solidFill>
-                  <a:srgbClr val="FFFFFF"/>
-                </a:solidFill>
-                <a:latin typeface="Calibri"/>
-                <a:ea typeface="Calibri"/>
-                <a:cs typeface="Calibri"/>
-                <a:sym typeface="Calibri"/>
-              </a:rPr>
-              <a:t>But the key is out of their reach</a:t>
-            </a:r>
-            <a:endParaRPr sz="1800" b="0" i="0" u="none" strike="noStrike" cap="none" dirty="0">
-              <a:solidFill>
-                <a:schemeClr val="dk1"/>
-              </a:solidFill>
-              <a:latin typeface="Calibri"/>
-              <a:ea typeface="Calibri"/>
-              <a:cs typeface="Calibri"/>
-              <a:sym typeface="Calibri"/>
-            </a:endParaRPr>
-          </a:p>
-        </p:txBody>
-      </p:sp>
-      <p:sp>
-        <p:nvSpPr>
-          <p:cNvPr id="224" name="Google Shape;224;p10"/>
-          <p:cNvSpPr/>
-          <p:nvPr/>
-        </p:nvSpPr>
-        <p:spPr>
-          <a:xfrm>
-            <a:off x="6583680" y="2779776"/>
-            <a:ext cx="4754880" cy="2103120"/>
-          </a:xfrm>
-          <a:prstGeom prst="rect">
-            <a:avLst/>
-          </a:prstGeom>
-          <a:noFill/>
-          <a:ln>
-            <a:noFill/>
-          </a:ln>
-        </p:spPr>
-        <p:txBody>
-          <a:bodyPr spcFirstLastPara="1" wrap="square" lIns="0" tIns="0" rIns="0" bIns="0" anchor="ctr" anchorCtr="0">
-            <a:noAutofit/>
-          </a:bodyPr>
-          <a:lstStyle/>
-          <a:p>
-            <a:pPr marL="342900" marR="0" lvl="0" indent="-342900" algn="l" rtl="0">
-              <a:lnSpc>
-                <a:spcPct val="144000"/>
-              </a:lnSpc>
-              <a:spcBef>
-                <a:spcPts val="0"/>
-              </a:spcBef>
-              <a:spcAft>
-                <a:spcPts val="0"/>
-              </a:spcAft>
-              <a:buClr>
-                <a:srgbClr val="EAF7F5"/>
-              </a:buClr>
-              <a:buSzPts val="1250"/>
-              <a:buFont typeface="Calibri"/>
-              <a:buChar char="•"/>
-            </a:pPr>
-            <a:r>
-              <a:rPr lang="en-US" b="0" i="0" u="none" strike="noStrike" cap="none" dirty="0">
-                <a:solidFill>
-                  <a:srgbClr val="EAF7F5"/>
-                </a:solidFill>
-                <a:latin typeface="Calibri"/>
-                <a:ea typeface="Calibri"/>
-                <a:cs typeface="Calibri"/>
-                <a:sym typeface="Calibri"/>
-              </a:rPr>
-              <a:t>On an HSM-backed tier, keys are generated &amp; kept inside FIPS-validated hardware — they never leave in plaintext</a:t>
-            </a:r>
-            <a:endParaRPr b="0" i="0" u="none" strike="noStrike" cap="none" dirty="0">
-              <a:solidFill>
-                <a:schemeClr val="dk1"/>
-              </a:solidFill>
-              <a:latin typeface="Calibri"/>
-              <a:ea typeface="Calibri"/>
-              <a:cs typeface="Calibri"/>
-              <a:sym typeface="Calibri"/>
-            </a:endParaRPr>
-          </a:p>
-          <a:p>
-            <a:pPr marL="342900" marR="0" lvl="0" indent="-342900" algn="l" rtl="0">
-              <a:lnSpc>
-                <a:spcPct val="144000"/>
-              </a:lnSpc>
-              <a:spcBef>
-                <a:spcPts val="0"/>
-              </a:spcBef>
-              <a:spcAft>
-                <a:spcPts val="0"/>
-              </a:spcAft>
-              <a:buClr>
-                <a:srgbClr val="EAF7F5"/>
-              </a:buClr>
-              <a:buSzPts val="1250"/>
-              <a:buFont typeface="Calibri"/>
-              <a:buChar char="•"/>
-            </a:pPr>
-            <a:r>
-              <a:rPr lang="en-US" b="0" i="0" u="none" strike="noStrike" cap="none" dirty="0">
-                <a:solidFill>
-                  <a:srgbClr val="EAF7F5"/>
-                </a:solidFill>
-                <a:latin typeface="Calibri"/>
-                <a:ea typeface="Calibri"/>
-                <a:cs typeface="Calibri"/>
-                <a:sym typeface="Calibri"/>
-              </a:rPr>
-              <a:t>Microsoft operators have no data-plane access to your key material</a:t>
-            </a:r>
-            <a:endParaRPr b="0" i="0" u="none" strike="noStrike" cap="none" dirty="0">
-              <a:solidFill>
-                <a:schemeClr val="dk1"/>
-              </a:solidFill>
-              <a:latin typeface="Calibri"/>
-              <a:ea typeface="Calibri"/>
-              <a:cs typeface="Calibri"/>
-              <a:sym typeface="Calibri"/>
-            </a:endParaRPr>
-          </a:p>
-          <a:p>
-            <a:pPr marL="342900" marR="0" lvl="0" indent="-342900" algn="l" rtl="0">
-              <a:lnSpc>
-                <a:spcPct val="144000"/>
-              </a:lnSpc>
-              <a:spcBef>
-                <a:spcPts val="0"/>
-              </a:spcBef>
-              <a:spcAft>
-                <a:spcPts val="0"/>
-              </a:spcAft>
-              <a:buClr>
-                <a:srgbClr val="EAF7F5"/>
-              </a:buClr>
-              <a:buSzPts val="1250"/>
-              <a:buFont typeface="Calibri"/>
-              <a:buChar char="•"/>
-            </a:pPr>
-            <a:r>
-              <a:rPr lang="en-US" b="0" i="0" u="none" strike="noStrike" cap="none" dirty="0">
-                <a:solidFill>
-                  <a:srgbClr val="EAF7F5"/>
-                </a:solidFill>
-                <a:latin typeface="Calibri"/>
-                <a:ea typeface="Calibri"/>
-                <a:cs typeface="Calibri"/>
-                <a:sym typeface="Calibri"/>
-              </a:rPr>
-              <a:t>Each Key Vault or Managed HSM is yours alone — MHSM adds a customer-owned security domain for extra isolation</a:t>
-            </a:r>
-            <a:endParaRPr b="0" i="0" u="none" strike="noStrike" cap="none" dirty="0">
-              <a:solidFill>
-                <a:schemeClr val="dk1"/>
-              </a:solidFill>
-              <a:latin typeface="Calibri"/>
-              <a:ea typeface="Calibri"/>
-              <a:cs typeface="Calibri"/>
-              <a:sym typeface="Calibri"/>
-            </a:endParaRPr>
-          </a:p>
-          <a:p>
-            <a:pPr marL="342900" marR="0" lvl="0" indent="-342900" algn="l" rtl="0">
-              <a:lnSpc>
-                <a:spcPct val="144000"/>
-              </a:lnSpc>
-              <a:spcBef>
-                <a:spcPts val="0"/>
-              </a:spcBef>
-              <a:spcAft>
-                <a:spcPts val="0"/>
-              </a:spcAft>
-              <a:buClr>
-                <a:srgbClr val="EAF7F5"/>
-              </a:buClr>
-              <a:buSzPts val="1250"/>
-              <a:buFont typeface="Calibri"/>
-              <a:buChar char="•"/>
-            </a:pPr>
-            <a:r>
-              <a:rPr lang="en-US" b="0" i="0" u="none" strike="noStrike" cap="none" dirty="0">
-                <a:solidFill>
-                  <a:srgbClr val="EAF7F5"/>
-                </a:solidFill>
-                <a:latin typeface="Calibri"/>
-                <a:ea typeface="Calibri"/>
-                <a:cs typeface="Calibri"/>
-                <a:sym typeface="Calibri"/>
-              </a:rPr>
-              <a:t>You can revoke at any time</a:t>
-            </a:r>
-            <a:endParaRPr b="0" i="0" u="none" strike="noStrike" cap="none" dirty="0">
-              <a:solidFill>
-                <a:schemeClr val="dk1"/>
-              </a:solidFill>
-              <a:latin typeface="Calibri"/>
-              <a:ea typeface="Calibri"/>
-              <a:cs typeface="Calibri"/>
-              <a:sym typeface="Calibri"/>
-            </a:endParaRPr>
-          </a:p>
-        </p:txBody>
-      </p:sp>
-      <p:sp>
-        <p:nvSpPr>
-          <p:cNvPr id="225" name="Google Shape;225;p10"/>
-          <p:cNvSpPr/>
-          <p:nvPr/>
-        </p:nvSpPr>
-        <p:spPr>
-          <a:xfrm>
-            <a:off x="640080" y="5358384"/>
-            <a:ext cx="10881360" cy="978408"/>
-          </a:xfrm>
-          <a:prstGeom prst="roundRect">
-            <a:avLst>
-              <a:gd name="adj" fmla="val 7692"/>
-            </a:avLst>
-          </a:prstGeom>
-          <a:solidFill>
-            <a:srgbClr val="FBF2E0"/>
-          </a:solidFill>
-          <a:ln>
-            <a:noFill/>
-          </a:ln>
-        </p:spPr>
-        <p:txBody>
-          <a:bodyPr spcFirstLastPara="1" wrap="square" lIns="91425" tIns="91425" rIns="91425" bIns="91425" anchor="ctr" anchorCtr="0">
-            <a:noAutofit/>
-          </a:bodyPr>
-          <a:lstStyle/>
-          <a:p>
-            <a:pPr marL="0" lvl="0" indent="0" algn="l" rtl="0">
-              <a:spcBef>
-                <a:spcPts val="0"/>
-              </a:spcBef>
-              <a:spcAft>
-                <a:spcPts val="0"/>
-              </a:spcAft>
-              <a:buNone/>
-            </a:pPr>
-            <a:endParaRPr/>
-          </a:p>
-        </p:txBody>
-      </p:sp>
-      <p:sp>
-        <p:nvSpPr>
-          <p:cNvPr id="226" name="Google Shape;226;p10"/>
-          <p:cNvSpPr/>
-          <p:nvPr/>
-        </p:nvSpPr>
-        <p:spPr>
-          <a:xfrm>
-            <a:off x="914400" y="5522976"/>
-            <a:ext cx="10424160" cy="713232"/>
-          </a:xfrm>
-          <a:prstGeom prst="rect">
-            <a:avLst/>
-          </a:prstGeom>
-          <a:noFill/>
-          <a:ln>
-            <a:noFill/>
-          </a:ln>
-        </p:spPr>
-        <p:txBody>
-          <a:bodyPr spcFirstLastPara="1" wrap="square" lIns="0" tIns="0" rIns="0" bIns="0" anchor="ctr" anchorCtr="0">
-            <a:noAutofit/>
-          </a:bodyPr>
-          <a:lstStyle/>
-          <a:p>
-            <a:pPr marL="0" marR="0" lvl="0" indent="0" algn="l" rtl="0">
-              <a:lnSpc>
-                <a:spcPct val="128000"/>
-              </a:lnSpc>
-              <a:spcBef>
-                <a:spcPts val="0"/>
-              </a:spcBef>
-              <a:spcAft>
-                <a:spcPts val="0"/>
-              </a:spcAft>
-              <a:buClr>
-                <a:srgbClr val="E0A33E"/>
-              </a:buClr>
-              <a:buSzPts val="1250"/>
-              <a:buFont typeface="Calibri"/>
-              <a:buNone/>
-            </a:pPr>
-            <a:r>
-              <a:rPr lang="en-US" b="1" i="0" u="none" strike="noStrike" cap="none" dirty="0">
-                <a:solidFill>
-                  <a:srgbClr val="E0A33E"/>
-                </a:solidFill>
-                <a:latin typeface="Calibri"/>
-                <a:ea typeface="Calibri"/>
-                <a:cs typeface="Calibri"/>
-                <a:sym typeface="Calibri"/>
-              </a:rPr>
-              <a:t>The accurate framing:  </a:t>
-            </a:r>
-            <a:r>
-              <a:rPr lang="en-US" b="0" i="0" u="none" strike="noStrike" cap="none" dirty="0">
-                <a:solidFill>
-                  <a:srgbClr val="1B2A33"/>
-                </a:solidFill>
-                <a:latin typeface="Calibri"/>
-                <a:ea typeface="Calibri"/>
-                <a:cs typeface="Calibri"/>
-                <a:sym typeface="Calibri"/>
-              </a:rPr>
-              <a:t>the key sits in Microsoft's hardware, but is designed so Microsoft can't operationally reach it and you can pull the plug. CMK shifts the trust model; it doesn't remove Microsoft from the chain, the exact gap EUCS’s “high” tier tests for, and that gap narrows most on an HSM-backed tier.</a:t>
-            </a:r>
-            <a:endParaRPr b="0" i="0" u="none" strike="noStrike" cap="none" dirty="0">
-              <a:solidFill>
-                <a:schemeClr val="dk1"/>
-              </a:solidFill>
-              <a:latin typeface="Calibri"/>
-              <a:ea typeface="Calibri"/>
-              <a:cs typeface="Calibri"/>
-              <a:sym typeface="Calibri"/>
-            </a:endParaRPr>
-          </a:p>
-        </p:txBody>
-      </p:sp>
-      <p:sp>
-        <p:nvSpPr>
-          <p:cNvPr id="227" name="Google Shape;227;p10"/>
-          <p:cNvSpPr/>
-          <p:nvPr/>
-        </p:nvSpPr>
-        <p:spPr>
-          <a:xfrm>
-            <a:off x="640080" y="6446520"/>
-            <a:ext cx="7315200" cy="274320"/>
-          </a:xfrm>
-          <a:prstGeom prst="rect">
-            <a:avLst/>
-          </a:prstGeom>
-          <a:noFill/>
-          <a:ln>
-            <a:noFill/>
-          </a:ln>
-        </p:spPr>
-        <p:txBody>
-          <a:bodyPr spcFirstLastPara="1" wrap="square" lIns="0" tIns="0" rIns="0" bIns="0" anchor="ctr" anchorCtr="0">
-            <a:noAutofit/>
-          </a:bodyPr>
-          <a:lstStyle/>
-          <a:p>
-            <a:pPr marL="0" marR="0" lvl="0" indent="0" algn="l" rtl="0">
-              <a:spcBef>
-                <a:spcPts val="0"/>
-              </a:spcBef>
-              <a:spcAft>
-                <a:spcPts val="0"/>
-              </a:spcAft>
-              <a:buClr>
-                <a:srgbClr val="5B6B72"/>
-              </a:buClr>
-              <a:buSzPts val="900"/>
-              <a:buFont typeface="Calibri"/>
-              <a:buNone/>
-            </a:pPr>
-            <a:r>
-              <a:rPr lang="en-US" sz="900" b="0" i="0" u="none" strike="noStrike" cap="none">
-                <a:solidFill>
-                  <a:srgbClr val="5B6B72"/>
-                </a:solidFill>
-                <a:latin typeface="Calibri"/>
-                <a:ea typeface="Calibri"/>
-                <a:cs typeface="Calibri"/>
-                <a:sym typeface="Calibri"/>
-              </a:rPr>
-              <a:t>Customer-Managed Keys in Microsoft Fabric</a:t>
-            </a:r>
-            <a:endParaRPr sz="900" b="0" i="0" u="none" strike="noStrike" cap="none">
-              <a:solidFill>
-                <a:schemeClr val="dk1"/>
-              </a:solidFill>
-              <a:latin typeface="Calibri"/>
-              <a:ea typeface="Calibri"/>
-              <a:cs typeface="Calibri"/>
-              <a:sym typeface="Calibri"/>
-            </a:endParaRPr>
-          </a:p>
-        </p:txBody>
-      </p:sp>
-      <p:sp>
-        <p:nvSpPr>
-          <p:cNvPr id="228" name="Google Shape;228;p10"/>
-          <p:cNvSpPr/>
-          <p:nvPr/>
-        </p:nvSpPr>
-        <p:spPr>
-          <a:xfrm>
-            <a:off x="11338560" y="6446520"/>
-            <a:ext cx="365760" cy="274320"/>
-          </a:xfrm>
-          <a:prstGeom prst="rect">
-            <a:avLst/>
-          </a:prstGeom>
-          <a:noFill/>
-          <a:ln>
-            <a:noFill/>
-          </a:ln>
-        </p:spPr>
-        <p:txBody>
-          <a:bodyPr spcFirstLastPara="1" wrap="square" lIns="0" tIns="0" rIns="0" bIns="0" anchor="ctr" anchorCtr="0">
-            <a:noAutofit/>
-          </a:bodyPr>
-          <a:lstStyle/>
-          <a:p>
-            <a:pPr marL="0" marR="0" lvl="0" indent="0" algn="r" rtl="0">
-              <a:spcBef>
-                <a:spcPts val="0"/>
-              </a:spcBef>
-              <a:spcAft>
-                <a:spcPts val="0"/>
-              </a:spcAft>
-              <a:buClr>
-                <a:srgbClr val="5B6B72"/>
-              </a:buClr>
-              <a:buSzPts val="900"/>
-              <a:buFont typeface="Calibri"/>
-              <a:buNone/>
-            </a:pPr>
-            <a:r>
-              <a:rPr lang="en-US" sz="900" b="0" i="0" u="none" strike="noStrike" cap="none">
-                <a:solidFill>
-                  <a:srgbClr val="5B6B72"/>
-                </a:solidFill>
-                <a:latin typeface="Calibri"/>
-                <a:ea typeface="Calibri"/>
-                <a:cs typeface="Calibri"/>
-                <a:sym typeface="Calibri"/>
-              </a:rPr>
-              <a:t>9</a:t>
             </a:r>
             <a:endParaRPr sz="900" b="0" i="0" u="none" strike="noStrike" cap="none">
               <a:solidFill>
@@ -28983,4 +29066,26 @@
   <a:objectDefaults/>
   <a:extraClrSchemeLst/>
 </a:theme>
+</file>
+
+<file path=ppt/webextensions/taskpanes.xml><?xml version="1.0" encoding="utf-8"?>
+<wetp:taskpanes xmlns:wetp="http://schemas.microsoft.com/office/webextensions/taskpanes/2010/11">
+  <wetp:taskpane dockstate="right" visibility="0" width="350" row="0">
+    <wetp:webextensionref xmlns:r="http://schemas.openxmlformats.org/officeDocument/2006/relationships" r:id="rId1"/>
+  </wetp:taskpane>
+</wetp:taskpanes>
+</file>
+
+<file path=ppt/webextensions/webextension1.xml><?xml version="1.0" encoding="utf-8"?>
+<we:webextension xmlns:we="http://schemas.microsoft.com/office/webextensions/webextension/2010/11" id="{6F0286E1-57D5-9744-B302-7A6D1885BB1B}">
+  <we:reference id="wa200010001" version="1.0.0.1" store="en-US" storeType="OMEX"/>
+  <we:alternateReferences>
+    <we:reference id="wa200010001" version="1.0.0.1" store="en-US" storeType="OMEX"/>
+  </we:alternateReferences>
+  <we:properties>
+    <we:property name="claude.fileId" value="&quot;61dfbf27-90f6-4317-9d82-4e15ea189250&quot;"/>
+  </we:properties>
+  <we:bindings/>
+  <we:snapshot xmlns:r="http://schemas.openxmlformats.org/officeDocument/2006/relationships"/>
+</we:webextension>
 </file>